--- a/aspose/slides_foss/_internal/pptx/Template.pptx
+++ b/aspose/slides_foss/_internal/pptx/Template.pptx
@@ -109,7 +109,7 @@
 
 <file path=ppt/slideLayouts/slideLayout1.xml><?xml version="1.0" encoding="utf-8"?>
 <p:sldLayout xmlns:a="http://schemas.openxmlformats.org/drawingml/2006/main" xmlns:r="http://schemas.openxmlformats.org/officeDocument/2006/relationships" xmlns:p="http://schemas.openxmlformats.org/presentationml/2006/main" type="title" preserve="1">
-  <p:cSld name="Титульный слайд">
+  <p:cSld name="Title Slide">
     <p:spTree>
       <p:nvGrpSpPr>
         <p:cNvPr id="1" name=""/>
@@ -126,10 +126,10 @@
       </p:grpSpPr>
       <p:sp>
         <p:nvSpPr>
-          <p:cNvPr id="2" name="Заголовок 1">
-            <a:extLst>
-              <a:ext uri="{FF2B5EF4-FFF2-40B4-BE49-F238E27FC236}">
-                <a16:creationId xmlns:a16="http://schemas.microsoft.com/office/drawing/2014/main" id="{EB85B98B-F41B-B9D7-4786-74C6E0B7080D}"/>
+          <p:cNvPr id="2" name="Title 1">
+            <a:extLst>
+              <a:ext uri="{FF2B5EF4-FFF2-40B4-BE49-F238E27FC236}">
+                <a16:creationId xmlns:a16="http://schemas.microsoft.com/office/drawing/2014/main" id="{499E233D-E380-4054-8636-A936181A7291}"/>
               </a:ext>
             </a:extLst>
           </p:cNvPr>
@@ -155,18 +155,19 @@
           </a:lstStyle>
           <a:p>
             <a:r>
-              <a:rPr lang="ru-RU"/>
-              <a:t>Образец заголовка</a:t>
-            </a:r>
-          </a:p>
-        </p:txBody>
-      </p:sp>
-      <p:sp>
-        <p:nvSpPr>
-          <p:cNvPr id="3" name="Подзаголовок 2">
-            <a:extLst>
-              <a:ext uri="{FF2B5EF4-FFF2-40B4-BE49-F238E27FC236}">
-                <a16:creationId xmlns:a16="http://schemas.microsoft.com/office/drawing/2014/main" id="{7A5A433A-6045-6EAB-EED9-FA6397A2BCA1}"/>
+              <a:rPr lang="en-US"/>
+              <a:t>Click to edit Master title style</a:t>
+            </a:r>
+            <a:endParaRPr lang="ru-RU"/>
+          </a:p>
+        </p:txBody>
+      </p:sp>
+      <p:sp>
+        <p:nvSpPr>
+          <p:cNvPr id="3" name="Subtitle 2">
+            <a:extLst>
+              <a:ext uri="{FF2B5EF4-FFF2-40B4-BE49-F238E27FC236}">
+                <a16:creationId xmlns:a16="http://schemas.microsoft.com/office/drawing/2014/main" id="{B9884E15-2E49-EDD7-5462-A2C618CA1128}"/>
               </a:ext>
             </a:extLst>
           </p:cNvPr>
@@ -225,18 +226,19 @@
           </a:lstStyle>
           <a:p>
             <a:r>
-              <a:rPr lang="ru-RU"/>
-              <a:t>Образец подзаголовка</a:t>
-            </a:r>
-          </a:p>
-        </p:txBody>
-      </p:sp>
-      <p:sp>
-        <p:nvSpPr>
-          <p:cNvPr id="4" name="Дата 3">
-            <a:extLst>
-              <a:ext uri="{FF2B5EF4-FFF2-40B4-BE49-F238E27FC236}">
-                <a16:creationId xmlns:a16="http://schemas.microsoft.com/office/drawing/2014/main" id="{2E0A761B-94B7-6D7F-8F7F-8817E9DA9EAE}"/>
+              <a:rPr lang="en-US"/>
+              <a:t>Click to edit Master subtitle style</a:t>
+            </a:r>
+            <a:endParaRPr lang="ru-RU"/>
+          </a:p>
+        </p:txBody>
+      </p:sp>
+      <p:sp>
+        <p:nvSpPr>
+          <p:cNvPr id="4" name="Date Placeholder 3">
+            <a:extLst>
+              <a:ext uri="{FF2B5EF4-FFF2-40B4-BE49-F238E27FC236}">
+                <a16:creationId xmlns:a16="http://schemas.microsoft.com/office/drawing/2014/main" id="{F965116A-D54A-9A7A-FD44-2D051C5D8CBB}"/>
               </a:ext>
             </a:extLst>
           </p:cNvPr>
@@ -252,9 +254,9 @@
           <a:bodyPr/>
           <a:lstStyle/>
           <a:p>
-            <a:fld id="{9757B1A7-0FDC-40C9-B67F-A43EAC5AEB09}" type="datetimeFigureOut">
+            <a:fld id="{961A2009-0CEE-41C1-939A-B9C723B78133}" type="datetimeFigureOut">
               <a:rPr lang="ru-RU" smtClean="0"/>
-              <a:t>04.02.2026</a:t>
+              <a:t>05.03.2026</a:t>
             </a:fld>
             <a:endParaRPr lang="ru-RU"/>
           </a:p>
@@ -262,10 +264,10 @@
       </p:sp>
       <p:sp>
         <p:nvSpPr>
-          <p:cNvPr id="5" name="Нижний колонтитул 4">
-            <a:extLst>
-              <a:ext uri="{FF2B5EF4-FFF2-40B4-BE49-F238E27FC236}">
-                <a16:creationId xmlns:a16="http://schemas.microsoft.com/office/drawing/2014/main" id="{292F70FE-ABF5-211D-542A-D42CF324C7F8}"/>
+          <p:cNvPr id="5" name="Footer Placeholder 4">
+            <a:extLst>
+              <a:ext uri="{FF2B5EF4-FFF2-40B4-BE49-F238E27FC236}">
+                <a16:creationId xmlns:a16="http://schemas.microsoft.com/office/drawing/2014/main" id="{115E23B8-DADF-4479-E1FC-4C7FBEBAC986}"/>
               </a:ext>
             </a:extLst>
           </p:cNvPr>
@@ -287,10 +289,10 @@
       </p:sp>
       <p:sp>
         <p:nvSpPr>
-          <p:cNvPr id="6" name="Номер слайда 5">
-            <a:extLst>
-              <a:ext uri="{FF2B5EF4-FFF2-40B4-BE49-F238E27FC236}">
-                <a16:creationId xmlns:a16="http://schemas.microsoft.com/office/drawing/2014/main" id="{545FB44B-A0DA-41AC-CAA9-ABE673E51112}"/>
+          <p:cNvPr id="6" name="Slide Number Placeholder 5">
+            <a:extLst>
+              <a:ext uri="{FF2B5EF4-FFF2-40B4-BE49-F238E27FC236}">
+                <a16:creationId xmlns:a16="http://schemas.microsoft.com/office/drawing/2014/main" id="{444547A4-A4FF-6E2D-20B5-F1BBBBAFA849}"/>
               </a:ext>
             </a:extLst>
           </p:cNvPr>
@@ -306,7 +308,7 @@
           <a:bodyPr/>
           <a:lstStyle/>
           <a:p>
-            <a:fld id="{42D7F972-A93D-42B4-85D0-25743E08EB40}" type="slidenum">
+            <a:fld id="{20CA96BB-6BF3-4E52-BE21-7A7A15C0727C}" type="slidenum">
               <a:rPr lang="ru-RU" smtClean="0"/>
               <a:t>‹#›</a:t>
             </a:fld>
@@ -317,7 +319,7 @@
     </p:spTree>
     <p:extLst>
       <p:ext uri="{BB962C8B-B14F-4D97-AF65-F5344CB8AC3E}">
-        <p14:creationId xmlns:p14="http://schemas.microsoft.com/office/powerpoint/2010/main" val="2987912810"/>
+        <p14:creationId xmlns:p14="http://schemas.microsoft.com/office/powerpoint/2010/main" val="68103658"/>
       </p:ext>
     </p:extLst>
   </p:cSld>
@@ -329,7 +331,7 @@
 
 <file path=ppt/slideLayouts/slideLayout10.xml><?xml version="1.0" encoding="utf-8"?>
 <p:sldLayout xmlns:a="http://schemas.openxmlformats.org/drawingml/2006/main" xmlns:r="http://schemas.openxmlformats.org/officeDocument/2006/relationships" xmlns:p="http://schemas.openxmlformats.org/presentationml/2006/main" type="vertTx" preserve="1">
-  <p:cSld name="Заголовок и вертикальный текст">
+  <p:cSld name="Title and Vertical Text">
     <p:spTree>
       <p:nvGrpSpPr>
         <p:cNvPr id="1" name=""/>
@@ -346,10 +348,10 @@
       </p:grpSpPr>
       <p:sp>
         <p:nvSpPr>
-          <p:cNvPr id="2" name="Заголовок 1">
-            <a:extLst>
-              <a:ext uri="{FF2B5EF4-FFF2-40B4-BE49-F238E27FC236}">
-                <a16:creationId xmlns:a16="http://schemas.microsoft.com/office/drawing/2014/main" id="{4E2F1044-037E-5534-3607-D190C2609E8C}"/>
+          <p:cNvPr id="2" name="Title 1">
+            <a:extLst>
+              <a:ext uri="{FF2B5EF4-FFF2-40B4-BE49-F238E27FC236}">
+                <a16:creationId xmlns:a16="http://schemas.microsoft.com/office/drawing/2014/main" id="{4865220C-E01C-5FFD-303B-6E3A60C73FCF}"/>
               </a:ext>
             </a:extLst>
           </p:cNvPr>
@@ -366,18 +368,19 @@
           <a:lstStyle/>
           <a:p>
             <a:r>
-              <a:rPr lang="ru-RU"/>
-              <a:t>Образец заголовка</a:t>
-            </a:r>
-          </a:p>
-        </p:txBody>
-      </p:sp>
-      <p:sp>
-        <p:nvSpPr>
-          <p:cNvPr id="3" name="Вертикальный текст 2">
-            <a:extLst>
-              <a:ext uri="{FF2B5EF4-FFF2-40B4-BE49-F238E27FC236}">
-                <a16:creationId xmlns:a16="http://schemas.microsoft.com/office/drawing/2014/main" id="{1B3F0E9E-8FA9-E173-2CD0-BD251B6E039A}"/>
+              <a:rPr lang="en-US"/>
+              <a:t>Click to edit Master title style</a:t>
+            </a:r>
+            <a:endParaRPr lang="ru-RU"/>
+          </a:p>
+        </p:txBody>
+      </p:sp>
+      <p:sp>
+        <p:nvSpPr>
+          <p:cNvPr id="3" name="Vertical Text Placeholder 2">
+            <a:extLst>
+              <a:ext uri="{FF2B5EF4-FFF2-40B4-BE49-F238E27FC236}">
+                <a16:creationId xmlns:a16="http://schemas.microsoft.com/office/drawing/2014/main" id="{8DBA1D6C-9A98-26C9-A22E-E8F6DE897736}"/>
               </a:ext>
             </a:extLst>
           </p:cNvPr>
@@ -395,46 +398,47 @@
           <a:p>
             <a:pPr lvl="0"/>
             <a:r>
-              <a:rPr lang="ru-RU"/>
-              <a:t>Образец текста</a:t>
+              <a:rPr lang="en-US"/>
+              <a:t>Click to edit Master text styles</a:t>
             </a:r>
           </a:p>
           <a:p>
             <a:pPr lvl="1"/>
             <a:r>
-              <a:rPr lang="ru-RU"/>
-              <a:t>Второй уровень</a:t>
+              <a:rPr lang="en-US"/>
+              <a:t>Second level</a:t>
             </a:r>
           </a:p>
           <a:p>
             <a:pPr lvl="2"/>
             <a:r>
-              <a:rPr lang="ru-RU"/>
-              <a:t>Третий уровень</a:t>
+              <a:rPr lang="en-US"/>
+              <a:t>Third level</a:t>
             </a:r>
           </a:p>
           <a:p>
             <a:pPr lvl="3"/>
             <a:r>
-              <a:rPr lang="ru-RU"/>
-              <a:t>Четвертый уровень</a:t>
+              <a:rPr lang="en-US"/>
+              <a:t>Fourth level</a:t>
             </a:r>
           </a:p>
           <a:p>
             <a:pPr lvl="4"/>
             <a:r>
-              <a:rPr lang="ru-RU"/>
-              <a:t>Пятый уровень</a:t>
-            </a:r>
-          </a:p>
-        </p:txBody>
-      </p:sp>
-      <p:sp>
-        <p:nvSpPr>
-          <p:cNvPr id="4" name="Дата 3">
-            <a:extLst>
-              <a:ext uri="{FF2B5EF4-FFF2-40B4-BE49-F238E27FC236}">
-                <a16:creationId xmlns:a16="http://schemas.microsoft.com/office/drawing/2014/main" id="{F5AF9B6E-2DCB-F1A7-5FFD-6F739C459FE1}"/>
+              <a:rPr lang="en-US"/>
+              <a:t>Fifth level</a:t>
+            </a:r>
+            <a:endParaRPr lang="ru-RU"/>
+          </a:p>
+        </p:txBody>
+      </p:sp>
+      <p:sp>
+        <p:nvSpPr>
+          <p:cNvPr id="4" name="Date Placeholder 3">
+            <a:extLst>
+              <a:ext uri="{FF2B5EF4-FFF2-40B4-BE49-F238E27FC236}">
+                <a16:creationId xmlns:a16="http://schemas.microsoft.com/office/drawing/2014/main" id="{63AB272D-71EF-3FE8-1595-FEEA0FCEAE42}"/>
               </a:ext>
             </a:extLst>
           </p:cNvPr>
@@ -450,9 +454,9 @@
           <a:bodyPr/>
           <a:lstStyle/>
           <a:p>
-            <a:fld id="{9757B1A7-0FDC-40C9-B67F-A43EAC5AEB09}" type="datetimeFigureOut">
+            <a:fld id="{961A2009-0CEE-41C1-939A-B9C723B78133}" type="datetimeFigureOut">
               <a:rPr lang="ru-RU" smtClean="0"/>
-              <a:t>04.02.2026</a:t>
+              <a:t>05.03.2026</a:t>
             </a:fld>
             <a:endParaRPr lang="ru-RU"/>
           </a:p>
@@ -460,10 +464,10 @@
       </p:sp>
       <p:sp>
         <p:nvSpPr>
-          <p:cNvPr id="5" name="Нижний колонтитул 4">
-            <a:extLst>
-              <a:ext uri="{FF2B5EF4-FFF2-40B4-BE49-F238E27FC236}">
-                <a16:creationId xmlns:a16="http://schemas.microsoft.com/office/drawing/2014/main" id="{5C7C73B2-75FE-FEA5-DFA5-8324CE4F7893}"/>
+          <p:cNvPr id="5" name="Footer Placeholder 4">
+            <a:extLst>
+              <a:ext uri="{FF2B5EF4-FFF2-40B4-BE49-F238E27FC236}">
+                <a16:creationId xmlns:a16="http://schemas.microsoft.com/office/drawing/2014/main" id="{DED38D48-AE37-04FB-AF67-303A41F2B47F}"/>
               </a:ext>
             </a:extLst>
           </p:cNvPr>
@@ -485,10 +489,10 @@
       </p:sp>
       <p:sp>
         <p:nvSpPr>
-          <p:cNvPr id="6" name="Номер слайда 5">
-            <a:extLst>
-              <a:ext uri="{FF2B5EF4-FFF2-40B4-BE49-F238E27FC236}">
-                <a16:creationId xmlns:a16="http://schemas.microsoft.com/office/drawing/2014/main" id="{EFE8F061-4747-6CCA-88C8-7948DCF9BEC8}"/>
+          <p:cNvPr id="6" name="Slide Number Placeholder 5">
+            <a:extLst>
+              <a:ext uri="{FF2B5EF4-FFF2-40B4-BE49-F238E27FC236}">
+                <a16:creationId xmlns:a16="http://schemas.microsoft.com/office/drawing/2014/main" id="{A3FD6EAA-AA92-28AE-A414-58B63887E3E1}"/>
               </a:ext>
             </a:extLst>
           </p:cNvPr>
@@ -504,7 +508,7 @@
           <a:bodyPr/>
           <a:lstStyle/>
           <a:p>
-            <a:fld id="{42D7F972-A93D-42B4-85D0-25743E08EB40}" type="slidenum">
+            <a:fld id="{20CA96BB-6BF3-4E52-BE21-7A7A15C0727C}" type="slidenum">
               <a:rPr lang="ru-RU" smtClean="0"/>
               <a:t>‹#›</a:t>
             </a:fld>
@@ -515,7 +519,7 @@
     </p:spTree>
     <p:extLst>
       <p:ext uri="{BB962C8B-B14F-4D97-AF65-F5344CB8AC3E}">
-        <p14:creationId xmlns:p14="http://schemas.microsoft.com/office/powerpoint/2010/main" val="593374534"/>
+        <p14:creationId xmlns:p14="http://schemas.microsoft.com/office/powerpoint/2010/main" val="2362319989"/>
       </p:ext>
     </p:extLst>
   </p:cSld>
@@ -527,7 +531,7 @@
 
 <file path=ppt/slideLayouts/slideLayout11.xml><?xml version="1.0" encoding="utf-8"?>
 <p:sldLayout xmlns:a="http://schemas.openxmlformats.org/drawingml/2006/main" xmlns:r="http://schemas.openxmlformats.org/officeDocument/2006/relationships" xmlns:p="http://schemas.openxmlformats.org/presentationml/2006/main" type="vertTitleAndTx" preserve="1">
-  <p:cSld name="Вертикальный заголовок и текст">
+  <p:cSld name="Vertical Title and Text">
     <p:spTree>
       <p:nvGrpSpPr>
         <p:cNvPr id="1" name=""/>
@@ -544,10 +548,10 @@
       </p:grpSpPr>
       <p:sp>
         <p:nvSpPr>
-          <p:cNvPr id="2" name="Вертикальный заголовок 1">
-            <a:extLst>
-              <a:ext uri="{FF2B5EF4-FFF2-40B4-BE49-F238E27FC236}">
-                <a16:creationId xmlns:a16="http://schemas.microsoft.com/office/drawing/2014/main" id="{62B09C10-78DD-DDA6-C1A5-D01C2BF8CCDD}"/>
+          <p:cNvPr id="2" name="Vertical Title 1">
+            <a:extLst>
+              <a:ext uri="{FF2B5EF4-FFF2-40B4-BE49-F238E27FC236}">
+                <a16:creationId xmlns:a16="http://schemas.microsoft.com/office/drawing/2014/main" id="{7004E85E-4B3B-5434-1A61-6A4BF5CE17A3}"/>
               </a:ext>
             </a:extLst>
           </p:cNvPr>
@@ -569,18 +573,19 @@
           <a:lstStyle/>
           <a:p>
             <a:r>
-              <a:rPr lang="ru-RU"/>
-              <a:t>Образец заголовка</a:t>
-            </a:r>
-          </a:p>
-        </p:txBody>
-      </p:sp>
-      <p:sp>
-        <p:nvSpPr>
-          <p:cNvPr id="3" name="Вертикальный текст 2">
-            <a:extLst>
-              <a:ext uri="{FF2B5EF4-FFF2-40B4-BE49-F238E27FC236}">
-                <a16:creationId xmlns:a16="http://schemas.microsoft.com/office/drawing/2014/main" id="{14B2CFBA-A485-B87F-EE82-4CC8C5C57241}"/>
+              <a:rPr lang="en-US"/>
+              <a:t>Click to edit Master title style</a:t>
+            </a:r>
+            <a:endParaRPr lang="ru-RU"/>
+          </a:p>
+        </p:txBody>
+      </p:sp>
+      <p:sp>
+        <p:nvSpPr>
+          <p:cNvPr id="3" name="Vertical Text Placeholder 2">
+            <a:extLst>
+              <a:ext uri="{FF2B5EF4-FFF2-40B4-BE49-F238E27FC236}">
+                <a16:creationId xmlns:a16="http://schemas.microsoft.com/office/drawing/2014/main" id="{7C954124-5D06-AC30-ECE2-4FD1E5163E26}"/>
               </a:ext>
             </a:extLst>
           </p:cNvPr>
@@ -603,46 +608,47 @@
           <a:p>
             <a:pPr lvl="0"/>
             <a:r>
-              <a:rPr lang="ru-RU"/>
-              <a:t>Образец текста</a:t>
+              <a:rPr lang="en-US"/>
+              <a:t>Click to edit Master text styles</a:t>
             </a:r>
           </a:p>
           <a:p>
             <a:pPr lvl="1"/>
             <a:r>
-              <a:rPr lang="ru-RU"/>
-              <a:t>Второй уровень</a:t>
+              <a:rPr lang="en-US"/>
+              <a:t>Second level</a:t>
             </a:r>
           </a:p>
           <a:p>
             <a:pPr lvl="2"/>
             <a:r>
-              <a:rPr lang="ru-RU"/>
-              <a:t>Третий уровень</a:t>
+              <a:rPr lang="en-US"/>
+              <a:t>Third level</a:t>
             </a:r>
           </a:p>
           <a:p>
             <a:pPr lvl="3"/>
             <a:r>
-              <a:rPr lang="ru-RU"/>
-              <a:t>Четвертый уровень</a:t>
+              <a:rPr lang="en-US"/>
+              <a:t>Fourth level</a:t>
             </a:r>
           </a:p>
           <a:p>
             <a:pPr lvl="4"/>
             <a:r>
-              <a:rPr lang="ru-RU"/>
-              <a:t>Пятый уровень</a:t>
-            </a:r>
-          </a:p>
-        </p:txBody>
-      </p:sp>
-      <p:sp>
-        <p:nvSpPr>
-          <p:cNvPr id="4" name="Дата 3">
-            <a:extLst>
-              <a:ext uri="{FF2B5EF4-FFF2-40B4-BE49-F238E27FC236}">
-                <a16:creationId xmlns:a16="http://schemas.microsoft.com/office/drawing/2014/main" id="{C9E9CEA6-2AF3-45AE-6099-0F3F6720B142}"/>
+              <a:rPr lang="en-US"/>
+              <a:t>Fifth level</a:t>
+            </a:r>
+            <a:endParaRPr lang="ru-RU"/>
+          </a:p>
+        </p:txBody>
+      </p:sp>
+      <p:sp>
+        <p:nvSpPr>
+          <p:cNvPr id="4" name="Date Placeholder 3">
+            <a:extLst>
+              <a:ext uri="{FF2B5EF4-FFF2-40B4-BE49-F238E27FC236}">
+                <a16:creationId xmlns:a16="http://schemas.microsoft.com/office/drawing/2014/main" id="{3FB33C8C-740B-5015-AB94-795FB8839BBF}"/>
               </a:ext>
             </a:extLst>
           </p:cNvPr>
@@ -658,9 +664,9 @@
           <a:bodyPr/>
           <a:lstStyle/>
           <a:p>
-            <a:fld id="{9757B1A7-0FDC-40C9-B67F-A43EAC5AEB09}" type="datetimeFigureOut">
+            <a:fld id="{961A2009-0CEE-41C1-939A-B9C723B78133}" type="datetimeFigureOut">
               <a:rPr lang="ru-RU" smtClean="0"/>
-              <a:t>04.02.2026</a:t>
+              <a:t>05.03.2026</a:t>
             </a:fld>
             <a:endParaRPr lang="ru-RU"/>
           </a:p>
@@ -668,10 +674,10 @@
       </p:sp>
       <p:sp>
         <p:nvSpPr>
-          <p:cNvPr id="5" name="Нижний колонтитул 4">
-            <a:extLst>
-              <a:ext uri="{FF2B5EF4-FFF2-40B4-BE49-F238E27FC236}">
-                <a16:creationId xmlns:a16="http://schemas.microsoft.com/office/drawing/2014/main" id="{CFD85C5B-64B4-BD54-F5D8-1BA9BCA144B7}"/>
+          <p:cNvPr id="5" name="Footer Placeholder 4">
+            <a:extLst>
+              <a:ext uri="{FF2B5EF4-FFF2-40B4-BE49-F238E27FC236}">
+                <a16:creationId xmlns:a16="http://schemas.microsoft.com/office/drawing/2014/main" id="{6EEDB20E-47BE-9BBB-636F-243280703C05}"/>
               </a:ext>
             </a:extLst>
           </p:cNvPr>
@@ -693,10 +699,10 @@
       </p:sp>
       <p:sp>
         <p:nvSpPr>
-          <p:cNvPr id="6" name="Номер слайда 5">
-            <a:extLst>
-              <a:ext uri="{FF2B5EF4-FFF2-40B4-BE49-F238E27FC236}">
-                <a16:creationId xmlns:a16="http://schemas.microsoft.com/office/drawing/2014/main" id="{7208D4DA-2999-49FE-BEF5-53CDD23BE999}"/>
+          <p:cNvPr id="6" name="Slide Number Placeholder 5">
+            <a:extLst>
+              <a:ext uri="{FF2B5EF4-FFF2-40B4-BE49-F238E27FC236}">
+                <a16:creationId xmlns:a16="http://schemas.microsoft.com/office/drawing/2014/main" id="{CD3973F5-7346-7C2B-02DA-76785E69E662}"/>
               </a:ext>
             </a:extLst>
           </p:cNvPr>
@@ -712,7 +718,7 @@
           <a:bodyPr/>
           <a:lstStyle/>
           <a:p>
-            <a:fld id="{42D7F972-A93D-42B4-85D0-25743E08EB40}" type="slidenum">
+            <a:fld id="{20CA96BB-6BF3-4E52-BE21-7A7A15C0727C}" type="slidenum">
               <a:rPr lang="ru-RU" smtClean="0"/>
               <a:t>‹#›</a:t>
             </a:fld>
@@ -723,7 +729,7 @@
     </p:spTree>
     <p:extLst>
       <p:ext uri="{BB962C8B-B14F-4D97-AF65-F5344CB8AC3E}">
-        <p14:creationId xmlns:p14="http://schemas.microsoft.com/office/powerpoint/2010/main" val="275757685"/>
+        <p14:creationId xmlns:p14="http://schemas.microsoft.com/office/powerpoint/2010/main" val="3676086520"/>
       </p:ext>
     </p:extLst>
   </p:cSld>
@@ -735,7 +741,7 @@
 
 <file path=ppt/slideLayouts/slideLayout2.xml><?xml version="1.0" encoding="utf-8"?>
 <p:sldLayout xmlns:a="http://schemas.openxmlformats.org/drawingml/2006/main" xmlns:r="http://schemas.openxmlformats.org/officeDocument/2006/relationships" xmlns:p="http://schemas.openxmlformats.org/presentationml/2006/main" type="obj" preserve="1">
-  <p:cSld name="Заголовок и объект">
+  <p:cSld name="Title and Content">
     <p:spTree>
       <p:nvGrpSpPr>
         <p:cNvPr id="1" name=""/>
@@ -752,10 +758,10 @@
       </p:grpSpPr>
       <p:sp>
         <p:nvSpPr>
-          <p:cNvPr id="2" name="Заголовок 1">
-            <a:extLst>
-              <a:ext uri="{FF2B5EF4-FFF2-40B4-BE49-F238E27FC236}">
-                <a16:creationId xmlns:a16="http://schemas.microsoft.com/office/drawing/2014/main" id="{DDB64D88-439D-F253-1F31-83882A5DE028}"/>
+          <p:cNvPr id="2" name="Title 1">
+            <a:extLst>
+              <a:ext uri="{FF2B5EF4-FFF2-40B4-BE49-F238E27FC236}">
+                <a16:creationId xmlns:a16="http://schemas.microsoft.com/office/drawing/2014/main" id="{57D1FF83-FF45-F9CD-DB85-22C2364AC7D3}"/>
               </a:ext>
             </a:extLst>
           </p:cNvPr>
@@ -772,18 +778,19 @@
           <a:lstStyle/>
           <a:p>
             <a:r>
-              <a:rPr lang="ru-RU"/>
-              <a:t>Образец заголовка</a:t>
-            </a:r>
-          </a:p>
-        </p:txBody>
-      </p:sp>
-      <p:sp>
-        <p:nvSpPr>
-          <p:cNvPr id="3" name="Объект 2">
-            <a:extLst>
-              <a:ext uri="{FF2B5EF4-FFF2-40B4-BE49-F238E27FC236}">
-                <a16:creationId xmlns:a16="http://schemas.microsoft.com/office/drawing/2014/main" id="{95B9FF20-AE52-AF8D-B790-CBCE6D02DB45}"/>
+              <a:rPr lang="en-US"/>
+              <a:t>Click to edit Master title style</a:t>
+            </a:r>
+            <a:endParaRPr lang="ru-RU"/>
+          </a:p>
+        </p:txBody>
+      </p:sp>
+      <p:sp>
+        <p:nvSpPr>
+          <p:cNvPr id="3" name="Content Placeholder 2">
+            <a:extLst>
+              <a:ext uri="{FF2B5EF4-FFF2-40B4-BE49-F238E27FC236}">
+                <a16:creationId xmlns:a16="http://schemas.microsoft.com/office/drawing/2014/main" id="{729DC82F-2D07-0CA2-6C73-43883C3FBD4C}"/>
               </a:ext>
             </a:extLst>
           </p:cNvPr>
@@ -801,46 +808,47 @@
           <a:p>
             <a:pPr lvl="0"/>
             <a:r>
-              <a:rPr lang="ru-RU"/>
-              <a:t>Образец текста</a:t>
+              <a:rPr lang="en-US"/>
+              <a:t>Click to edit Master text styles</a:t>
             </a:r>
           </a:p>
           <a:p>
             <a:pPr lvl="1"/>
             <a:r>
-              <a:rPr lang="ru-RU"/>
-              <a:t>Второй уровень</a:t>
+              <a:rPr lang="en-US"/>
+              <a:t>Second level</a:t>
             </a:r>
           </a:p>
           <a:p>
             <a:pPr lvl="2"/>
             <a:r>
-              <a:rPr lang="ru-RU"/>
-              <a:t>Третий уровень</a:t>
+              <a:rPr lang="en-US"/>
+              <a:t>Third level</a:t>
             </a:r>
           </a:p>
           <a:p>
             <a:pPr lvl="3"/>
             <a:r>
-              <a:rPr lang="ru-RU"/>
-              <a:t>Четвертый уровень</a:t>
+              <a:rPr lang="en-US"/>
+              <a:t>Fourth level</a:t>
             </a:r>
           </a:p>
           <a:p>
             <a:pPr lvl="4"/>
             <a:r>
-              <a:rPr lang="ru-RU"/>
-              <a:t>Пятый уровень</a:t>
-            </a:r>
-          </a:p>
-        </p:txBody>
-      </p:sp>
-      <p:sp>
-        <p:nvSpPr>
-          <p:cNvPr id="4" name="Дата 3">
-            <a:extLst>
-              <a:ext uri="{FF2B5EF4-FFF2-40B4-BE49-F238E27FC236}">
-                <a16:creationId xmlns:a16="http://schemas.microsoft.com/office/drawing/2014/main" id="{642D88CD-E554-F971-9486-9167541FC528}"/>
+              <a:rPr lang="en-US"/>
+              <a:t>Fifth level</a:t>
+            </a:r>
+            <a:endParaRPr lang="ru-RU"/>
+          </a:p>
+        </p:txBody>
+      </p:sp>
+      <p:sp>
+        <p:nvSpPr>
+          <p:cNvPr id="4" name="Date Placeholder 3">
+            <a:extLst>
+              <a:ext uri="{FF2B5EF4-FFF2-40B4-BE49-F238E27FC236}">
+                <a16:creationId xmlns:a16="http://schemas.microsoft.com/office/drawing/2014/main" id="{CCE3BE2F-E942-72AE-657D-1EF606F3327B}"/>
               </a:ext>
             </a:extLst>
           </p:cNvPr>
@@ -856,9 +864,9 @@
           <a:bodyPr/>
           <a:lstStyle/>
           <a:p>
-            <a:fld id="{9757B1A7-0FDC-40C9-B67F-A43EAC5AEB09}" type="datetimeFigureOut">
+            <a:fld id="{961A2009-0CEE-41C1-939A-B9C723B78133}" type="datetimeFigureOut">
               <a:rPr lang="ru-RU" smtClean="0"/>
-              <a:t>04.02.2026</a:t>
+              <a:t>05.03.2026</a:t>
             </a:fld>
             <a:endParaRPr lang="ru-RU"/>
           </a:p>
@@ -866,10 +874,10 @@
       </p:sp>
       <p:sp>
         <p:nvSpPr>
-          <p:cNvPr id="5" name="Нижний колонтитул 4">
-            <a:extLst>
-              <a:ext uri="{FF2B5EF4-FFF2-40B4-BE49-F238E27FC236}">
-                <a16:creationId xmlns:a16="http://schemas.microsoft.com/office/drawing/2014/main" id="{E918C2D8-E7E8-EB18-A549-856E91F1B36D}"/>
+          <p:cNvPr id="5" name="Footer Placeholder 4">
+            <a:extLst>
+              <a:ext uri="{FF2B5EF4-FFF2-40B4-BE49-F238E27FC236}">
+                <a16:creationId xmlns:a16="http://schemas.microsoft.com/office/drawing/2014/main" id="{10A5D966-EB44-DAEE-CD5D-276D6A002020}"/>
               </a:ext>
             </a:extLst>
           </p:cNvPr>
@@ -891,10 +899,10 @@
       </p:sp>
       <p:sp>
         <p:nvSpPr>
-          <p:cNvPr id="6" name="Номер слайда 5">
-            <a:extLst>
-              <a:ext uri="{FF2B5EF4-FFF2-40B4-BE49-F238E27FC236}">
-                <a16:creationId xmlns:a16="http://schemas.microsoft.com/office/drawing/2014/main" id="{361C6171-7718-3A49-A60C-D2BB3E9C8234}"/>
+          <p:cNvPr id="6" name="Slide Number Placeholder 5">
+            <a:extLst>
+              <a:ext uri="{FF2B5EF4-FFF2-40B4-BE49-F238E27FC236}">
+                <a16:creationId xmlns:a16="http://schemas.microsoft.com/office/drawing/2014/main" id="{17AAE6AA-4DE5-186F-6FA5-EAA06F218BC0}"/>
               </a:ext>
             </a:extLst>
           </p:cNvPr>
@@ -910,7 +918,7 @@
           <a:bodyPr/>
           <a:lstStyle/>
           <a:p>
-            <a:fld id="{42D7F972-A93D-42B4-85D0-25743E08EB40}" type="slidenum">
+            <a:fld id="{20CA96BB-6BF3-4E52-BE21-7A7A15C0727C}" type="slidenum">
               <a:rPr lang="ru-RU" smtClean="0"/>
               <a:t>‹#›</a:t>
             </a:fld>
@@ -921,7 +929,7 @@
     </p:spTree>
     <p:extLst>
       <p:ext uri="{BB962C8B-B14F-4D97-AF65-F5344CB8AC3E}">
-        <p14:creationId xmlns:p14="http://schemas.microsoft.com/office/powerpoint/2010/main" val="2873335581"/>
+        <p14:creationId xmlns:p14="http://schemas.microsoft.com/office/powerpoint/2010/main" val="2133250215"/>
       </p:ext>
     </p:extLst>
   </p:cSld>
@@ -933,7 +941,7 @@
 
 <file path=ppt/slideLayouts/slideLayout3.xml><?xml version="1.0" encoding="utf-8"?>
 <p:sldLayout xmlns:a="http://schemas.openxmlformats.org/drawingml/2006/main" xmlns:r="http://schemas.openxmlformats.org/officeDocument/2006/relationships" xmlns:p="http://schemas.openxmlformats.org/presentationml/2006/main" type="secHead" preserve="1">
-  <p:cSld name="Заголовок раздела">
+  <p:cSld name="Section Header">
     <p:spTree>
       <p:nvGrpSpPr>
         <p:cNvPr id="1" name=""/>
@@ -950,10 +958,10 @@
       </p:grpSpPr>
       <p:sp>
         <p:nvSpPr>
-          <p:cNvPr id="2" name="Заголовок 1">
-            <a:extLst>
-              <a:ext uri="{FF2B5EF4-FFF2-40B4-BE49-F238E27FC236}">
-                <a16:creationId xmlns:a16="http://schemas.microsoft.com/office/drawing/2014/main" id="{39C450D2-1D78-75B4-D9CB-AB5B97756A60}"/>
+          <p:cNvPr id="2" name="Title 1">
+            <a:extLst>
+              <a:ext uri="{FF2B5EF4-FFF2-40B4-BE49-F238E27FC236}">
+                <a16:creationId xmlns:a16="http://schemas.microsoft.com/office/drawing/2014/main" id="{D16EB0BF-FF83-28D8-D4A5-1B97C098A11F}"/>
               </a:ext>
             </a:extLst>
           </p:cNvPr>
@@ -979,18 +987,19 @@
           </a:lstStyle>
           <a:p>
             <a:r>
-              <a:rPr lang="ru-RU"/>
-              <a:t>Образец заголовка</a:t>
-            </a:r>
-          </a:p>
-        </p:txBody>
-      </p:sp>
-      <p:sp>
-        <p:nvSpPr>
-          <p:cNvPr id="3" name="Текст 2">
-            <a:extLst>
-              <a:ext uri="{FF2B5EF4-FFF2-40B4-BE49-F238E27FC236}">
-                <a16:creationId xmlns:a16="http://schemas.microsoft.com/office/drawing/2014/main" id="{B2218424-0D34-1206-BFE8-57226F987597}"/>
+              <a:rPr lang="en-US"/>
+              <a:t>Click to edit Master title style</a:t>
+            </a:r>
+            <a:endParaRPr lang="ru-RU"/>
+          </a:p>
+        </p:txBody>
+      </p:sp>
+      <p:sp>
+        <p:nvSpPr>
+          <p:cNvPr id="3" name="Text Placeholder 2">
+            <a:extLst>
+              <a:ext uri="{FF2B5EF4-FFF2-40B4-BE49-F238E27FC236}">
+                <a16:creationId xmlns:a16="http://schemas.microsoft.com/office/drawing/2014/main" id="{CF6A6750-0987-5071-00E1-CB2CEA719424}"/>
               </a:ext>
             </a:extLst>
           </p:cNvPr>
@@ -1015,7 +1024,7 @@
               <a:defRPr sz="2400">
                 <a:solidFill>
                   <a:schemeClr val="tx1">
-                    <a:tint val="75000"/>
+                    <a:tint val="82000"/>
                   </a:schemeClr>
                 </a:solidFill>
               </a:defRPr>
@@ -1025,7 +1034,7 @@
               <a:defRPr sz="2000">
                 <a:solidFill>
                   <a:schemeClr val="tx1">
-                    <a:tint val="75000"/>
+                    <a:tint val="82000"/>
                   </a:schemeClr>
                 </a:solidFill>
               </a:defRPr>
@@ -1035,7 +1044,7 @@
               <a:defRPr sz="1800">
                 <a:solidFill>
                   <a:schemeClr val="tx1">
-                    <a:tint val="75000"/>
+                    <a:tint val="82000"/>
                   </a:schemeClr>
                 </a:solidFill>
               </a:defRPr>
@@ -1045,7 +1054,7 @@
               <a:defRPr sz="1600">
                 <a:solidFill>
                   <a:schemeClr val="tx1">
-                    <a:tint val="75000"/>
+                    <a:tint val="82000"/>
                   </a:schemeClr>
                 </a:solidFill>
               </a:defRPr>
@@ -1055,7 +1064,7 @@
               <a:defRPr sz="1600">
                 <a:solidFill>
                   <a:schemeClr val="tx1">
-                    <a:tint val="75000"/>
+                    <a:tint val="82000"/>
                   </a:schemeClr>
                 </a:solidFill>
               </a:defRPr>
@@ -1065,7 +1074,7 @@
               <a:defRPr sz="1600">
                 <a:solidFill>
                   <a:schemeClr val="tx1">
-                    <a:tint val="75000"/>
+                    <a:tint val="82000"/>
                   </a:schemeClr>
                 </a:solidFill>
               </a:defRPr>
@@ -1075,7 +1084,7 @@
               <a:defRPr sz="1600">
                 <a:solidFill>
                   <a:schemeClr val="tx1">
-                    <a:tint val="75000"/>
+                    <a:tint val="82000"/>
                   </a:schemeClr>
                 </a:solidFill>
               </a:defRPr>
@@ -1085,7 +1094,7 @@
               <a:defRPr sz="1600">
                 <a:solidFill>
                   <a:schemeClr val="tx1">
-                    <a:tint val="75000"/>
+                    <a:tint val="82000"/>
                   </a:schemeClr>
                 </a:solidFill>
               </a:defRPr>
@@ -1095,7 +1104,7 @@
               <a:defRPr sz="1600">
                 <a:solidFill>
                   <a:schemeClr val="tx1">
-                    <a:tint val="75000"/>
+                    <a:tint val="82000"/>
                   </a:schemeClr>
                 </a:solidFill>
               </a:defRPr>
@@ -1104,18 +1113,18 @@
           <a:p>
             <a:pPr lvl="0"/>
             <a:r>
-              <a:rPr lang="ru-RU"/>
-              <a:t>Образец текста</a:t>
-            </a:r>
-          </a:p>
-        </p:txBody>
-      </p:sp>
-      <p:sp>
-        <p:nvSpPr>
-          <p:cNvPr id="4" name="Дата 3">
-            <a:extLst>
-              <a:ext uri="{FF2B5EF4-FFF2-40B4-BE49-F238E27FC236}">
-                <a16:creationId xmlns:a16="http://schemas.microsoft.com/office/drawing/2014/main" id="{6FE178D1-9F76-103D-7A8C-41473E927314}"/>
+              <a:rPr lang="en-US"/>
+              <a:t>Click to edit Master text styles</a:t>
+            </a:r>
+          </a:p>
+        </p:txBody>
+      </p:sp>
+      <p:sp>
+        <p:nvSpPr>
+          <p:cNvPr id="4" name="Date Placeholder 3">
+            <a:extLst>
+              <a:ext uri="{FF2B5EF4-FFF2-40B4-BE49-F238E27FC236}">
+                <a16:creationId xmlns:a16="http://schemas.microsoft.com/office/drawing/2014/main" id="{FDDF00D8-A330-B33F-3FE3-4713DBC0256B}"/>
               </a:ext>
             </a:extLst>
           </p:cNvPr>
@@ -1131,9 +1140,9 @@
           <a:bodyPr/>
           <a:lstStyle/>
           <a:p>
-            <a:fld id="{9757B1A7-0FDC-40C9-B67F-A43EAC5AEB09}" type="datetimeFigureOut">
+            <a:fld id="{961A2009-0CEE-41C1-939A-B9C723B78133}" type="datetimeFigureOut">
               <a:rPr lang="ru-RU" smtClean="0"/>
-              <a:t>04.02.2026</a:t>
+              <a:t>05.03.2026</a:t>
             </a:fld>
             <a:endParaRPr lang="ru-RU"/>
           </a:p>
@@ -1141,10 +1150,10 @@
       </p:sp>
       <p:sp>
         <p:nvSpPr>
-          <p:cNvPr id="5" name="Нижний колонтитул 4">
-            <a:extLst>
-              <a:ext uri="{FF2B5EF4-FFF2-40B4-BE49-F238E27FC236}">
-                <a16:creationId xmlns:a16="http://schemas.microsoft.com/office/drawing/2014/main" id="{F1B0724D-6AC8-711C-5D63-B5A8D6DB52D6}"/>
+          <p:cNvPr id="5" name="Footer Placeholder 4">
+            <a:extLst>
+              <a:ext uri="{FF2B5EF4-FFF2-40B4-BE49-F238E27FC236}">
+                <a16:creationId xmlns:a16="http://schemas.microsoft.com/office/drawing/2014/main" id="{A4840508-BDEA-686B-E72C-F616BD6007D1}"/>
               </a:ext>
             </a:extLst>
           </p:cNvPr>
@@ -1166,10 +1175,10 @@
       </p:sp>
       <p:sp>
         <p:nvSpPr>
-          <p:cNvPr id="6" name="Номер слайда 5">
-            <a:extLst>
-              <a:ext uri="{FF2B5EF4-FFF2-40B4-BE49-F238E27FC236}">
-                <a16:creationId xmlns:a16="http://schemas.microsoft.com/office/drawing/2014/main" id="{10FEFA58-9B69-E833-0F8C-5A6366378F9E}"/>
+          <p:cNvPr id="6" name="Slide Number Placeholder 5">
+            <a:extLst>
+              <a:ext uri="{FF2B5EF4-FFF2-40B4-BE49-F238E27FC236}">
+                <a16:creationId xmlns:a16="http://schemas.microsoft.com/office/drawing/2014/main" id="{F9B9BCFC-F19A-BE7A-6757-6B77D3FF6944}"/>
               </a:ext>
             </a:extLst>
           </p:cNvPr>
@@ -1185,7 +1194,7 @@
           <a:bodyPr/>
           <a:lstStyle/>
           <a:p>
-            <a:fld id="{42D7F972-A93D-42B4-85D0-25743E08EB40}" type="slidenum">
+            <a:fld id="{20CA96BB-6BF3-4E52-BE21-7A7A15C0727C}" type="slidenum">
               <a:rPr lang="ru-RU" smtClean="0"/>
               <a:t>‹#›</a:t>
             </a:fld>
@@ -1196,7 +1205,7 @@
     </p:spTree>
     <p:extLst>
       <p:ext uri="{BB962C8B-B14F-4D97-AF65-F5344CB8AC3E}">
-        <p14:creationId xmlns:p14="http://schemas.microsoft.com/office/powerpoint/2010/main" val="815198118"/>
+        <p14:creationId xmlns:p14="http://schemas.microsoft.com/office/powerpoint/2010/main" val="1325099766"/>
       </p:ext>
     </p:extLst>
   </p:cSld>
@@ -1208,7 +1217,7 @@
 
 <file path=ppt/slideLayouts/slideLayout4.xml><?xml version="1.0" encoding="utf-8"?>
 <p:sldLayout xmlns:a="http://schemas.openxmlformats.org/drawingml/2006/main" xmlns:r="http://schemas.openxmlformats.org/officeDocument/2006/relationships" xmlns:p="http://schemas.openxmlformats.org/presentationml/2006/main" type="twoObj" preserve="1">
-  <p:cSld name="Два объекта">
+  <p:cSld name="Two Content">
     <p:spTree>
       <p:nvGrpSpPr>
         <p:cNvPr id="1" name=""/>
@@ -1225,10 +1234,10 @@
       </p:grpSpPr>
       <p:sp>
         <p:nvSpPr>
-          <p:cNvPr id="2" name="Заголовок 1">
-            <a:extLst>
-              <a:ext uri="{FF2B5EF4-FFF2-40B4-BE49-F238E27FC236}">
-                <a16:creationId xmlns:a16="http://schemas.microsoft.com/office/drawing/2014/main" id="{F1D4A87D-9B60-6DA9-F2A4-3351B0257557}"/>
+          <p:cNvPr id="2" name="Title 1">
+            <a:extLst>
+              <a:ext uri="{FF2B5EF4-FFF2-40B4-BE49-F238E27FC236}">
+                <a16:creationId xmlns:a16="http://schemas.microsoft.com/office/drawing/2014/main" id="{9B0213EA-2534-745B-7805-4D5973E7F5EB}"/>
               </a:ext>
             </a:extLst>
           </p:cNvPr>
@@ -1245,18 +1254,19 @@
           <a:lstStyle/>
           <a:p>
             <a:r>
-              <a:rPr lang="ru-RU"/>
-              <a:t>Образец заголовка</a:t>
-            </a:r>
-          </a:p>
-        </p:txBody>
-      </p:sp>
-      <p:sp>
-        <p:nvSpPr>
-          <p:cNvPr id="3" name="Объект 2">
-            <a:extLst>
-              <a:ext uri="{FF2B5EF4-FFF2-40B4-BE49-F238E27FC236}">
-                <a16:creationId xmlns:a16="http://schemas.microsoft.com/office/drawing/2014/main" id="{515C57DE-BA02-BC54-BAD7-C66307736AD2}"/>
+              <a:rPr lang="en-US"/>
+              <a:t>Click to edit Master title style</a:t>
+            </a:r>
+            <a:endParaRPr lang="ru-RU"/>
+          </a:p>
+        </p:txBody>
+      </p:sp>
+      <p:sp>
+        <p:nvSpPr>
+          <p:cNvPr id="3" name="Content Placeholder 2">
+            <a:extLst>
+              <a:ext uri="{FF2B5EF4-FFF2-40B4-BE49-F238E27FC236}">
+                <a16:creationId xmlns:a16="http://schemas.microsoft.com/office/drawing/2014/main" id="{4BA18873-9F4C-5A24-D9A0-B6FDFB7C7AA6}"/>
               </a:ext>
             </a:extLst>
           </p:cNvPr>
@@ -1279,46 +1289,47 @@
           <a:p>
             <a:pPr lvl="0"/>
             <a:r>
-              <a:rPr lang="ru-RU"/>
-              <a:t>Образец текста</a:t>
+              <a:rPr lang="en-US"/>
+              <a:t>Click to edit Master text styles</a:t>
             </a:r>
           </a:p>
           <a:p>
             <a:pPr lvl="1"/>
             <a:r>
-              <a:rPr lang="ru-RU"/>
-              <a:t>Второй уровень</a:t>
+              <a:rPr lang="en-US"/>
+              <a:t>Second level</a:t>
             </a:r>
           </a:p>
           <a:p>
             <a:pPr lvl="2"/>
             <a:r>
-              <a:rPr lang="ru-RU"/>
-              <a:t>Третий уровень</a:t>
+              <a:rPr lang="en-US"/>
+              <a:t>Third level</a:t>
             </a:r>
           </a:p>
           <a:p>
             <a:pPr lvl="3"/>
             <a:r>
-              <a:rPr lang="ru-RU"/>
-              <a:t>Четвертый уровень</a:t>
+              <a:rPr lang="en-US"/>
+              <a:t>Fourth level</a:t>
             </a:r>
           </a:p>
           <a:p>
             <a:pPr lvl="4"/>
             <a:r>
-              <a:rPr lang="ru-RU"/>
-              <a:t>Пятый уровень</a:t>
-            </a:r>
-          </a:p>
-        </p:txBody>
-      </p:sp>
-      <p:sp>
-        <p:nvSpPr>
-          <p:cNvPr id="4" name="Объект 3">
-            <a:extLst>
-              <a:ext uri="{FF2B5EF4-FFF2-40B4-BE49-F238E27FC236}">
-                <a16:creationId xmlns:a16="http://schemas.microsoft.com/office/drawing/2014/main" id="{9BEC0597-A5C6-3862-34D0-AED92EFDEE37}"/>
+              <a:rPr lang="en-US"/>
+              <a:t>Fifth level</a:t>
+            </a:r>
+            <a:endParaRPr lang="ru-RU"/>
+          </a:p>
+        </p:txBody>
+      </p:sp>
+      <p:sp>
+        <p:nvSpPr>
+          <p:cNvPr id="4" name="Content Placeholder 3">
+            <a:extLst>
+              <a:ext uri="{FF2B5EF4-FFF2-40B4-BE49-F238E27FC236}">
+                <a16:creationId xmlns:a16="http://schemas.microsoft.com/office/drawing/2014/main" id="{24165C14-C943-1EDF-AE11-F83DB670709E}"/>
               </a:ext>
             </a:extLst>
           </p:cNvPr>
@@ -1341,46 +1352,47 @@
           <a:p>
             <a:pPr lvl="0"/>
             <a:r>
-              <a:rPr lang="ru-RU"/>
-              <a:t>Образец текста</a:t>
+              <a:rPr lang="en-US"/>
+              <a:t>Click to edit Master text styles</a:t>
             </a:r>
           </a:p>
           <a:p>
             <a:pPr lvl="1"/>
             <a:r>
-              <a:rPr lang="ru-RU"/>
-              <a:t>Второй уровень</a:t>
+              <a:rPr lang="en-US"/>
+              <a:t>Second level</a:t>
             </a:r>
           </a:p>
           <a:p>
             <a:pPr lvl="2"/>
             <a:r>
-              <a:rPr lang="ru-RU"/>
-              <a:t>Третий уровень</a:t>
+              <a:rPr lang="en-US"/>
+              <a:t>Third level</a:t>
             </a:r>
           </a:p>
           <a:p>
             <a:pPr lvl="3"/>
             <a:r>
-              <a:rPr lang="ru-RU"/>
-              <a:t>Четвертый уровень</a:t>
+              <a:rPr lang="en-US"/>
+              <a:t>Fourth level</a:t>
             </a:r>
           </a:p>
           <a:p>
             <a:pPr lvl="4"/>
             <a:r>
-              <a:rPr lang="ru-RU"/>
-              <a:t>Пятый уровень</a:t>
-            </a:r>
-          </a:p>
-        </p:txBody>
-      </p:sp>
-      <p:sp>
-        <p:nvSpPr>
-          <p:cNvPr id="5" name="Дата 4">
-            <a:extLst>
-              <a:ext uri="{FF2B5EF4-FFF2-40B4-BE49-F238E27FC236}">
-                <a16:creationId xmlns:a16="http://schemas.microsoft.com/office/drawing/2014/main" id="{14EA6B28-100B-2B9E-8A76-30D42876E714}"/>
+              <a:rPr lang="en-US"/>
+              <a:t>Fifth level</a:t>
+            </a:r>
+            <a:endParaRPr lang="ru-RU"/>
+          </a:p>
+        </p:txBody>
+      </p:sp>
+      <p:sp>
+        <p:nvSpPr>
+          <p:cNvPr id="5" name="Date Placeholder 4">
+            <a:extLst>
+              <a:ext uri="{FF2B5EF4-FFF2-40B4-BE49-F238E27FC236}">
+                <a16:creationId xmlns:a16="http://schemas.microsoft.com/office/drawing/2014/main" id="{69D0F60F-7DA6-8187-A845-43B4E800E38A}"/>
               </a:ext>
             </a:extLst>
           </p:cNvPr>
@@ -1396,9 +1408,9 @@
           <a:bodyPr/>
           <a:lstStyle/>
           <a:p>
-            <a:fld id="{9757B1A7-0FDC-40C9-B67F-A43EAC5AEB09}" type="datetimeFigureOut">
+            <a:fld id="{961A2009-0CEE-41C1-939A-B9C723B78133}" type="datetimeFigureOut">
               <a:rPr lang="ru-RU" smtClean="0"/>
-              <a:t>04.02.2026</a:t>
+              <a:t>05.03.2026</a:t>
             </a:fld>
             <a:endParaRPr lang="ru-RU"/>
           </a:p>
@@ -1406,10 +1418,10 @@
       </p:sp>
       <p:sp>
         <p:nvSpPr>
-          <p:cNvPr id="6" name="Нижний колонтитул 5">
-            <a:extLst>
-              <a:ext uri="{FF2B5EF4-FFF2-40B4-BE49-F238E27FC236}">
-                <a16:creationId xmlns:a16="http://schemas.microsoft.com/office/drawing/2014/main" id="{F956932B-7917-729F-C148-CABF497E05FC}"/>
+          <p:cNvPr id="6" name="Footer Placeholder 5">
+            <a:extLst>
+              <a:ext uri="{FF2B5EF4-FFF2-40B4-BE49-F238E27FC236}">
+                <a16:creationId xmlns:a16="http://schemas.microsoft.com/office/drawing/2014/main" id="{AF5A37D8-4789-662D-0DDA-8015F9B7DA7E}"/>
               </a:ext>
             </a:extLst>
           </p:cNvPr>
@@ -1431,10 +1443,10 @@
       </p:sp>
       <p:sp>
         <p:nvSpPr>
-          <p:cNvPr id="7" name="Номер слайда 6">
-            <a:extLst>
-              <a:ext uri="{FF2B5EF4-FFF2-40B4-BE49-F238E27FC236}">
-                <a16:creationId xmlns:a16="http://schemas.microsoft.com/office/drawing/2014/main" id="{9ABB5D29-A9DE-B121-432A-EC1C4CE9670B}"/>
+          <p:cNvPr id="7" name="Slide Number Placeholder 6">
+            <a:extLst>
+              <a:ext uri="{FF2B5EF4-FFF2-40B4-BE49-F238E27FC236}">
+                <a16:creationId xmlns:a16="http://schemas.microsoft.com/office/drawing/2014/main" id="{05E44BFF-EBA6-8471-7A6F-2D2102FBAD19}"/>
               </a:ext>
             </a:extLst>
           </p:cNvPr>
@@ -1450,7 +1462,7 @@
           <a:bodyPr/>
           <a:lstStyle/>
           <a:p>
-            <a:fld id="{42D7F972-A93D-42B4-85D0-25743E08EB40}" type="slidenum">
+            <a:fld id="{20CA96BB-6BF3-4E52-BE21-7A7A15C0727C}" type="slidenum">
               <a:rPr lang="ru-RU" smtClean="0"/>
               <a:t>‹#›</a:t>
             </a:fld>
@@ -1461,7 +1473,7 @@
     </p:spTree>
     <p:extLst>
       <p:ext uri="{BB962C8B-B14F-4D97-AF65-F5344CB8AC3E}">
-        <p14:creationId xmlns:p14="http://schemas.microsoft.com/office/powerpoint/2010/main" val="1928279250"/>
+        <p14:creationId xmlns:p14="http://schemas.microsoft.com/office/powerpoint/2010/main" val="4173801008"/>
       </p:ext>
     </p:extLst>
   </p:cSld>
@@ -1473,7 +1485,7 @@
 
 <file path=ppt/slideLayouts/slideLayout5.xml><?xml version="1.0" encoding="utf-8"?>
 <p:sldLayout xmlns:a="http://schemas.openxmlformats.org/drawingml/2006/main" xmlns:r="http://schemas.openxmlformats.org/officeDocument/2006/relationships" xmlns:p="http://schemas.openxmlformats.org/presentationml/2006/main" type="twoTxTwoObj" preserve="1">
-  <p:cSld name="Сравнение">
+  <p:cSld name="Comparison">
     <p:spTree>
       <p:nvGrpSpPr>
         <p:cNvPr id="1" name=""/>
@@ -1490,10 +1502,10 @@
       </p:grpSpPr>
       <p:sp>
         <p:nvSpPr>
-          <p:cNvPr id="2" name="Заголовок 1">
-            <a:extLst>
-              <a:ext uri="{FF2B5EF4-FFF2-40B4-BE49-F238E27FC236}">
-                <a16:creationId xmlns:a16="http://schemas.microsoft.com/office/drawing/2014/main" id="{99675336-39E1-1BB1-09E8-2E1FAC6BC997}"/>
+          <p:cNvPr id="2" name="Title 1">
+            <a:extLst>
+              <a:ext uri="{FF2B5EF4-FFF2-40B4-BE49-F238E27FC236}">
+                <a16:creationId xmlns:a16="http://schemas.microsoft.com/office/drawing/2014/main" id="{4F6F7693-190A-A378-9238-28EC886E1F2E}"/>
               </a:ext>
             </a:extLst>
           </p:cNvPr>
@@ -1515,18 +1527,19 @@
           <a:lstStyle/>
           <a:p>
             <a:r>
-              <a:rPr lang="ru-RU"/>
-              <a:t>Образец заголовка</a:t>
-            </a:r>
-          </a:p>
-        </p:txBody>
-      </p:sp>
-      <p:sp>
-        <p:nvSpPr>
-          <p:cNvPr id="3" name="Текст 2">
-            <a:extLst>
-              <a:ext uri="{FF2B5EF4-FFF2-40B4-BE49-F238E27FC236}">
-                <a16:creationId xmlns:a16="http://schemas.microsoft.com/office/drawing/2014/main" id="{65D2D848-D6B9-16F3-CD9E-548A9BB3007F}"/>
+              <a:rPr lang="en-US"/>
+              <a:t>Click to edit Master title style</a:t>
+            </a:r>
+            <a:endParaRPr lang="ru-RU"/>
+          </a:p>
+        </p:txBody>
+      </p:sp>
+      <p:sp>
+        <p:nvSpPr>
+          <p:cNvPr id="3" name="Text Placeholder 2">
+            <a:extLst>
+              <a:ext uri="{FF2B5EF4-FFF2-40B4-BE49-F238E27FC236}">
+                <a16:creationId xmlns:a16="http://schemas.microsoft.com/office/drawing/2014/main" id="{89354090-B2A4-2933-5A31-E21B6DC18FA9}"/>
               </a:ext>
             </a:extLst>
           </p:cNvPr>
@@ -1586,18 +1599,18 @@
           <a:p>
             <a:pPr lvl="0"/>
             <a:r>
-              <a:rPr lang="ru-RU"/>
-              <a:t>Образец текста</a:t>
-            </a:r>
-          </a:p>
-        </p:txBody>
-      </p:sp>
-      <p:sp>
-        <p:nvSpPr>
-          <p:cNvPr id="4" name="Объект 3">
-            <a:extLst>
-              <a:ext uri="{FF2B5EF4-FFF2-40B4-BE49-F238E27FC236}">
-                <a16:creationId xmlns:a16="http://schemas.microsoft.com/office/drawing/2014/main" id="{6D0D674D-597E-74B8-8EB8-27AFA87A2DF5}"/>
+              <a:rPr lang="en-US"/>
+              <a:t>Click to edit Master text styles</a:t>
+            </a:r>
+          </a:p>
+        </p:txBody>
+      </p:sp>
+      <p:sp>
+        <p:nvSpPr>
+          <p:cNvPr id="4" name="Content Placeholder 3">
+            <a:extLst>
+              <a:ext uri="{FF2B5EF4-FFF2-40B4-BE49-F238E27FC236}">
+                <a16:creationId xmlns:a16="http://schemas.microsoft.com/office/drawing/2014/main" id="{B428248F-7DCC-908D-C2C6-4971EE5B70B1}"/>
               </a:ext>
             </a:extLst>
           </p:cNvPr>
@@ -1620,46 +1633,47 @@
           <a:p>
             <a:pPr lvl="0"/>
             <a:r>
-              <a:rPr lang="ru-RU"/>
-              <a:t>Образец текста</a:t>
+              <a:rPr lang="en-US"/>
+              <a:t>Click to edit Master text styles</a:t>
             </a:r>
           </a:p>
           <a:p>
             <a:pPr lvl="1"/>
             <a:r>
-              <a:rPr lang="ru-RU"/>
-              <a:t>Второй уровень</a:t>
+              <a:rPr lang="en-US"/>
+              <a:t>Second level</a:t>
             </a:r>
           </a:p>
           <a:p>
             <a:pPr lvl="2"/>
             <a:r>
-              <a:rPr lang="ru-RU"/>
-              <a:t>Третий уровень</a:t>
+              <a:rPr lang="en-US"/>
+              <a:t>Third level</a:t>
             </a:r>
           </a:p>
           <a:p>
             <a:pPr lvl="3"/>
             <a:r>
-              <a:rPr lang="ru-RU"/>
-              <a:t>Четвертый уровень</a:t>
+              <a:rPr lang="en-US"/>
+              <a:t>Fourth level</a:t>
             </a:r>
           </a:p>
           <a:p>
             <a:pPr lvl="4"/>
             <a:r>
-              <a:rPr lang="ru-RU"/>
-              <a:t>Пятый уровень</a:t>
-            </a:r>
-          </a:p>
-        </p:txBody>
-      </p:sp>
-      <p:sp>
-        <p:nvSpPr>
-          <p:cNvPr id="5" name="Текст 4">
-            <a:extLst>
-              <a:ext uri="{FF2B5EF4-FFF2-40B4-BE49-F238E27FC236}">
-                <a16:creationId xmlns:a16="http://schemas.microsoft.com/office/drawing/2014/main" id="{01529850-F0ED-0EC8-2CCD-2B56C7F316C9}"/>
+              <a:rPr lang="en-US"/>
+              <a:t>Fifth level</a:t>
+            </a:r>
+            <a:endParaRPr lang="ru-RU"/>
+          </a:p>
+        </p:txBody>
+      </p:sp>
+      <p:sp>
+        <p:nvSpPr>
+          <p:cNvPr id="5" name="Text Placeholder 4">
+            <a:extLst>
+              <a:ext uri="{FF2B5EF4-FFF2-40B4-BE49-F238E27FC236}">
+                <a16:creationId xmlns:a16="http://schemas.microsoft.com/office/drawing/2014/main" id="{4DB42156-7316-0013-53E3-218ACA8ED92F}"/>
               </a:ext>
             </a:extLst>
           </p:cNvPr>
@@ -1719,18 +1733,18 @@
           <a:p>
             <a:pPr lvl="0"/>
             <a:r>
-              <a:rPr lang="ru-RU"/>
-              <a:t>Образец текста</a:t>
-            </a:r>
-          </a:p>
-        </p:txBody>
-      </p:sp>
-      <p:sp>
-        <p:nvSpPr>
-          <p:cNvPr id="6" name="Объект 5">
-            <a:extLst>
-              <a:ext uri="{FF2B5EF4-FFF2-40B4-BE49-F238E27FC236}">
-                <a16:creationId xmlns:a16="http://schemas.microsoft.com/office/drawing/2014/main" id="{3C7837AB-929D-E85F-169A-650F2B2EFB99}"/>
+              <a:rPr lang="en-US"/>
+              <a:t>Click to edit Master text styles</a:t>
+            </a:r>
+          </a:p>
+        </p:txBody>
+      </p:sp>
+      <p:sp>
+        <p:nvSpPr>
+          <p:cNvPr id="6" name="Content Placeholder 5">
+            <a:extLst>
+              <a:ext uri="{FF2B5EF4-FFF2-40B4-BE49-F238E27FC236}">
+                <a16:creationId xmlns:a16="http://schemas.microsoft.com/office/drawing/2014/main" id="{E04B6884-63EB-0572-0BFD-FC66C82E7DF3}"/>
               </a:ext>
             </a:extLst>
           </p:cNvPr>
@@ -1753,46 +1767,47 @@
           <a:p>
             <a:pPr lvl="0"/>
             <a:r>
-              <a:rPr lang="ru-RU"/>
-              <a:t>Образец текста</a:t>
+              <a:rPr lang="en-US"/>
+              <a:t>Click to edit Master text styles</a:t>
             </a:r>
           </a:p>
           <a:p>
             <a:pPr lvl="1"/>
             <a:r>
-              <a:rPr lang="ru-RU"/>
-              <a:t>Второй уровень</a:t>
+              <a:rPr lang="en-US"/>
+              <a:t>Second level</a:t>
             </a:r>
           </a:p>
           <a:p>
             <a:pPr lvl="2"/>
             <a:r>
-              <a:rPr lang="ru-RU"/>
-              <a:t>Третий уровень</a:t>
+              <a:rPr lang="en-US"/>
+              <a:t>Third level</a:t>
             </a:r>
           </a:p>
           <a:p>
             <a:pPr lvl="3"/>
             <a:r>
-              <a:rPr lang="ru-RU"/>
-              <a:t>Четвертый уровень</a:t>
+              <a:rPr lang="en-US"/>
+              <a:t>Fourth level</a:t>
             </a:r>
           </a:p>
           <a:p>
             <a:pPr lvl="4"/>
             <a:r>
-              <a:rPr lang="ru-RU"/>
-              <a:t>Пятый уровень</a:t>
-            </a:r>
-          </a:p>
-        </p:txBody>
-      </p:sp>
-      <p:sp>
-        <p:nvSpPr>
-          <p:cNvPr id="7" name="Дата 6">
-            <a:extLst>
-              <a:ext uri="{FF2B5EF4-FFF2-40B4-BE49-F238E27FC236}">
-                <a16:creationId xmlns:a16="http://schemas.microsoft.com/office/drawing/2014/main" id="{457E9C33-88D9-AA70-62CB-62A36B38A170}"/>
+              <a:rPr lang="en-US"/>
+              <a:t>Fifth level</a:t>
+            </a:r>
+            <a:endParaRPr lang="ru-RU"/>
+          </a:p>
+        </p:txBody>
+      </p:sp>
+      <p:sp>
+        <p:nvSpPr>
+          <p:cNvPr id="7" name="Date Placeholder 6">
+            <a:extLst>
+              <a:ext uri="{FF2B5EF4-FFF2-40B4-BE49-F238E27FC236}">
+                <a16:creationId xmlns:a16="http://schemas.microsoft.com/office/drawing/2014/main" id="{5AC6917B-B64D-AD9E-1D30-A157734E84AC}"/>
               </a:ext>
             </a:extLst>
           </p:cNvPr>
@@ -1808,9 +1823,9 @@
           <a:bodyPr/>
           <a:lstStyle/>
           <a:p>
-            <a:fld id="{9757B1A7-0FDC-40C9-B67F-A43EAC5AEB09}" type="datetimeFigureOut">
+            <a:fld id="{961A2009-0CEE-41C1-939A-B9C723B78133}" type="datetimeFigureOut">
               <a:rPr lang="ru-RU" smtClean="0"/>
-              <a:t>04.02.2026</a:t>
+              <a:t>05.03.2026</a:t>
             </a:fld>
             <a:endParaRPr lang="ru-RU"/>
           </a:p>
@@ -1818,10 +1833,10 @@
       </p:sp>
       <p:sp>
         <p:nvSpPr>
-          <p:cNvPr id="8" name="Нижний колонтитул 7">
-            <a:extLst>
-              <a:ext uri="{FF2B5EF4-FFF2-40B4-BE49-F238E27FC236}">
-                <a16:creationId xmlns:a16="http://schemas.microsoft.com/office/drawing/2014/main" id="{382CCA61-2F55-EB02-FBF0-8C2B0ED263DD}"/>
+          <p:cNvPr id="8" name="Footer Placeholder 7">
+            <a:extLst>
+              <a:ext uri="{FF2B5EF4-FFF2-40B4-BE49-F238E27FC236}">
+                <a16:creationId xmlns:a16="http://schemas.microsoft.com/office/drawing/2014/main" id="{C475AFC1-84B5-54AD-7B42-F8B861602F11}"/>
               </a:ext>
             </a:extLst>
           </p:cNvPr>
@@ -1843,10 +1858,10 @@
       </p:sp>
       <p:sp>
         <p:nvSpPr>
-          <p:cNvPr id="9" name="Номер слайда 8">
-            <a:extLst>
-              <a:ext uri="{FF2B5EF4-FFF2-40B4-BE49-F238E27FC236}">
-                <a16:creationId xmlns:a16="http://schemas.microsoft.com/office/drawing/2014/main" id="{EA67DF5A-C355-F235-AD31-EB1F5FB62FC8}"/>
+          <p:cNvPr id="9" name="Slide Number Placeholder 8">
+            <a:extLst>
+              <a:ext uri="{FF2B5EF4-FFF2-40B4-BE49-F238E27FC236}">
+                <a16:creationId xmlns:a16="http://schemas.microsoft.com/office/drawing/2014/main" id="{6B694659-38AE-93FF-6C9D-043A11F97CA0}"/>
               </a:ext>
             </a:extLst>
           </p:cNvPr>
@@ -1862,7 +1877,7 @@
           <a:bodyPr/>
           <a:lstStyle/>
           <a:p>
-            <a:fld id="{42D7F972-A93D-42B4-85D0-25743E08EB40}" type="slidenum">
+            <a:fld id="{20CA96BB-6BF3-4E52-BE21-7A7A15C0727C}" type="slidenum">
               <a:rPr lang="ru-RU" smtClean="0"/>
               <a:t>‹#›</a:t>
             </a:fld>
@@ -1873,7 +1888,7 @@
     </p:spTree>
     <p:extLst>
       <p:ext uri="{BB962C8B-B14F-4D97-AF65-F5344CB8AC3E}">
-        <p14:creationId xmlns:p14="http://schemas.microsoft.com/office/powerpoint/2010/main" val="2155574911"/>
+        <p14:creationId xmlns:p14="http://schemas.microsoft.com/office/powerpoint/2010/main" val="1514139868"/>
       </p:ext>
     </p:extLst>
   </p:cSld>
@@ -1885,7 +1900,7 @@
 
 <file path=ppt/slideLayouts/slideLayout6.xml><?xml version="1.0" encoding="utf-8"?>
 <p:sldLayout xmlns:a="http://schemas.openxmlformats.org/drawingml/2006/main" xmlns:r="http://schemas.openxmlformats.org/officeDocument/2006/relationships" xmlns:p="http://schemas.openxmlformats.org/presentationml/2006/main" type="titleOnly" preserve="1">
-  <p:cSld name="Только заголовок">
+  <p:cSld name="Title Only">
     <p:spTree>
       <p:nvGrpSpPr>
         <p:cNvPr id="1" name=""/>
@@ -1902,10 +1917,10 @@
       </p:grpSpPr>
       <p:sp>
         <p:nvSpPr>
-          <p:cNvPr id="2" name="Заголовок 1">
-            <a:extLst>
-              <a:ext uri="{FF2B5EF4-FFF2-40B4-BE49-F238E27FC236}">
-                <a16:creationId xmlns:a16="http://schemas.microsoft.com/office/drawing/2014/main" id="{9DCEAC0E-7FD4-5CD7-5A5C-381338074F84}"/>
+          <p:cNvPr id="2" name="Title 1">
+            <a:extLst>
+              <a:ext uri="{FF2B5EF4-FFF2-40B4-BE49-F238E27FC236}">
+                <a16:creationId xmlns:a16="http://schemas.microsoft.com/office/drawing/2014/main" id="{D9978ABC-9069-BEAD-AD0A-34F60467E8A4}"/>
               </a:ext>
             </a:extLst>
           </p:cNvPr>
@@ -1922,18 +1937,19 @@
           <a:lstStyle/>
           <a:p>
             <a:r>
-              <a:rPr lang="ru-RU"/>
-              <a:t>Образец заголовка</a:t>
-            </a:r>
-          </a:p>
-        </p:txBody>
-      </p:sp>
-      <p:sp>
-        <p:nvSpPr>
-          <p:cNvPr id="3" name="Дата 2">
-            <a:extLst>
-              <a:ext uri="{FF2B5EF4-FFF2-40B4-BE49-F238E27FC236}">
-                <a16:creationId xmlns:a16="http://schemas.microsoft.com/office/drawing/2014/main" id="{DFE282B0-E6C5-621D-B9CC-C0DF4308A152}"/>
+              <a:rPr lang="en-US"/>
+              <a:t>Click to edit Master title style</a:t>
+            </a:r>
+            <a:endParaRPr lang="ru-RU"/>
+          </a:p>
+        </p:txBody>
+      </p:sp>
+      <p:sp>
+        <p:nvSpPr>
+          <p:cNvPr id="3" name="Date Placeholder 2">
+            <a:extLst>
+              <a:ext uri="{FF2B5EF4-FFF2-40B4-BE49-F238E27FC236}">
+                <a16:creationId xmlns:a16="http://schemas.microsoft.com/office/drawing/2014/main" id="{27F88149-3EF5-F555-9EED-CB444DA1AD96}"/>
               </a:ext>
             </a:extLst>
           </p:cNvPr>
@@ -1949,9 +1965,9 @@
           <a:bodyPr/>
           <a:lstStyle/>
           <a:p>
-            <a:fld id="{9757B1A7-0FDC-40C9-B67F-A43EAC5AEB09}" type="datetimeFigureOut">
+            <a:fld id="{961A2009-0CEE-41C1-939A-B9C723B78133}" type="datetimeFigureOut">
               <a:rPr lang="ru-RU" smtClean="0"/>
-              <a:t>04.02.2026</a:t>
+              <a:t>05.03.2026</a:t>
             </a:fld>
             <a:endParaRPr lang="ru-RU"/>
           </a:p>
@@ -1959,10 +1975,10 @@
       </p:sp>
       <p:sp>
         <p:nvSpPr>
-          <p:cNvPr id="4" name="Нижний колонтитул 3">
-            <a:extLst>
-              <a:ext uri="{FF2B5EF4-FFF2-40B4-BE49-F238E27FC236}">
-                <a16:creationId xmlns:a16="http://schemas.microsoft.com/office/drawing/2014/main" id="{4642812F-0AC4-C0D1-5767-10E867ACF1D2}"/>
+          <p:cNvPr id="4" name="Footer Placeholder 3">
+            <a:extLst>
+              <a:ext uri="{FF2B5EF4-FFF2-40B4-BE49-F238E27FC236}">
+                <a16:creationId xmlns:a16="http://schemas.microsoft.com/office/drawing/2014/main" id="{8E021061-3292-CA9C-F704-E572ED84C172}"/>
               </a:ext>
             </a:extLst>
           </p:cNvPr>
@@ -1984,10 +2000,10 @@
       </p:sp>
       <p:sp>
         <p:nvSpPr>
-          <p:cNvPr id="5" name="Номер слайда 4">
-            <a:extLst>
-              <a:ext uri="{FF2B5EF4-FFF2-40B4-BE49-F238E27FC236}">
-                <a16:creationId xmlns:a16="http://schemas.microsoft.com/office/drawing/2014/main" id="{E781B209-06AA-9531-C26F-07E6335986E0}"/>
+          <p:cNvPr id="5" name="Slide Number Placeholder 4">
+            <a:extLst>
+              <a:ext uri="{FF2B5EF4-FFF2-40B4-BE49-F238E27FC236}">
+                <a16:creationId xmlns:a16="http://schemas.microsoft.com/office/drawing/2014/main" id="{6C8A62FB-F613-FD33-C235-7459BDB6FB76}"/>
               </a:ext>
             </a:extLst>
           </p:cNvPr>
@@ -2003,7 +2019,7 @@
           <a:bodyPr/>
           <a:lstStyle/>
           <a:p>
-            <a:fld id="{42D7F972-A93D-42B4-85D0-25743E08EB40}" type="slidenum">
+            <a:fld id="{20CA96BB-6BF3-4E52-BE21-7A7A15C0727C}" type="slidenum">
               <a:rPr lang="ru-RU" smtClean="0"/>
               <a:t>‹#›</a:t>
             </a:fld>
@@ -2014,7 +2030,7 @@
     </p:spTree>
     <p:extLst>
       <p:ext uri="{BB962C8B-B14F-4D97-AF65-F5344CB8AC3E}">
-        <p14:creationId xmlns:p14="http://schemas.microsoft.com/office/powerpoint/2010/main" val="541983718"/>
+        <p14:creationId xmlns:p14="http://schemas.microsoft.com/office/powerpoint/2010/main" val="3449250592"/>
       </p:ext>
     </p:extLst>
   </p:cSld>
@@ -2026,7 +2042,7 @@
 
 <file path=ppt/slideLayouts/slideLayout7.xml><?xml version="1.0" encoding="utf-8"?>
 <p:sldLayout xmlns:a="http://schemas.openxmlformats.org/drawingml/2006/main" xmlns:r="http://schemas.openxmlformats.org/officeDocument/2006/relationships" xmlns:p="http://schemas.openxmlformats.org/presentationml/2006/main" type="blank" preserve="1">
-  <p:cSld name="Пустой слайд">
+  <p:cSld name="Blank">
     <p:spTree>
       <p:nvGrpSpPr>
         <p:cNvPr id="1" name=""/>
@@ -2043,10 +2059,10 @@
       </p:grpSpPr>
       <p:sp>
         <p:nvSpPr>
-          <p:cNvPr id="2" name="Дата 1">
-            <a:extLst>
-              <a:ext uri="{FF2B5EF4-FFF2-40B4-BE49-F238E27FC236}">
-                <a16:creationId xmlns:a16="http://schemas.microsoft.com/office/drawing/2014/main" id="{8C49B1D8-DE00-2FFB-526C-B4D63ED63AB4}"/>
+          <p:cNvPr id="2" name="Date Placeholder 1">
+            <a:extLst>
+              <a:ext uri="{FF2B5EF4-FFF2-40B4-BE49-F238E27FC236}">
+                <a16:creationId xmlns:a16="http://schemas.microsoft.com/office/drawing/2014/main" id="{15E2D87C-C9C1-F1BD-DE5E-1824814F97CE}"/>
               </a:ext>
             </a:extLst>
           </p:cNvPr>
@@ -2062,9 +2078,9 @@
           <a:bodyPr/>
           <a:lstStyle/>
           <a:p>
-            <a:fld id="{9757B1A7-0FDC-40C9-B67F-A43EAC5AEB09}" type="datetimeFigureOut">
+            <a:fld id="{961A2009-0CEE-41C1-939A-B9C723B78133}" type="datetimeFigureOut">
               <a:rPr lang="ru-RU" smtClean="0"/>
-              <a:t>04.02.2026</a:t>
+              <a:t>05.03.2026</a:t>
             </a:fld>
             <a:endParaRPr lang="ru-RU"/>
           </a:p>
@@ -2072,10 +2088,10 @@
       </p:sp>
       <p:sp>
         <p:nvSpPr>
-          <p:cNvPr id="3" name="Нижний колонтитул 2">
-            <a:extLst>
-              <a:ext uri="{FF2B5EF4-FFF2-40B4-BE49-F238E27FC236}">
-                <a16:creationId xmlns:a16="http://schemas.microsoft.com/office/drawing/2014/main" id="{55CED67F-C84E-E571-2C38-7483901106DD}"/>
+          <p:cNvPr id="3" name="Footer Placeholder 2">
+            <a:extLst>
+              <a:ext uri="{FF2B5EF4-FFF2-40B4-BE49-F238E27FC236}">
+                <a16:creationId xmlns:a16="http://schemas.microsoft.com/office/drawing/2014/main" id="{C016AB82-3AC5-25F1-266E-AFF429C9D810}"/>
               </a:ext>
             </a:extLst>
           </p:cNvPr>
@@ -2097,10 +2113,10 @@
       </p:sp>
       <p:sp>
         <p:nvSpPr>
-          <p:cNvPr id="4" name="Номер слайда 3">
-            <a:extLst>
-              <a:ext uri="{FF2B5EF4-FFF2-40B4-BE49-F238E27FC236}">
-                <a16:creationId xmlns:a16="http://schemas.microsoft.com/office/drawing/2014/main" id="{C40F3371-D2FE-581D-5991-08C4E8ABB40D}"/>
+          <p:cNvPr id="4" name="Slide Number Placeholder 3">
+            <a:extLst>
+              <a:ext uri="{FF2B5EF4-FFF2-40B4-BE49-F238E27FC236}">
+                <a16:creationId xmlns:a16="http://schemas.microsoft.com/office/drawing/2014/main" id="{5423B3A3-EED1-89DC-5D3B-D47C0BB5DC77}"/>
               </a:ext>
             </a:extLst>
           </p:cNvPr>
@@ -2116,7 +2132,7 @@
           <a:bodyPr/>
           <a:lstStyle/>
           <a:p>
-            <a:fld id="{42D7F972-A93D-42B4-85D0-25743E08EB40}" type="slidenum">
+            <a:fld id="{20CA96BB-6BF3-4E52-BE21-7A7A15C0727C}" type="slidenum">
               <a:rPr lang="ru-RU" smtClean="0"/>
               <a:t>‹#›</a:t>
             </a:fld>
@@ -2127,7 +2143,7 @@
     </p:spTree>
     <p:extLst>
       <p:ext uri="{BB962C8B-B14F-4D97-AF65-F5344CB8AC3E}">
-        <p14:creationId xmlns:p14="http://schemas.microsoft.com/office/powerpoint/2010/main" val="441436931"/>
+        <p14:creationId xmlns:p14="http://schemas.microsoft.com/office/powerpoint/2010/main" val="770470271"/>
       </p:ext>
     </p:extLst>
   </p:cSld>
@@ -2139,7 +2155,7 @@
 
 <file path=ppt/slideLayouts/slideLayout8.xml><?xml version="1.0" encoding="utf-8"?>
 <p:sldLayout xmlns:a="http://schemas.openxmlformats.org/drawingml/2006/main" xmlns:r="http://schemas.openxmlformats.org/officeDocument/2006/relationships" xmlns:p="http://schemas.openxmlformats.org/presentationml/2006/main" type="objTx" preserve="1">
-  <p:cSld name="Объект с подписью">
+  <p:cSld name="Content with Caption">
     <p:spTree>
       <p:nvGrpSpPr>
         <p:cNvPr id="1" name=""/>
@@ -2156,10 +2172,10 @@
       </p:grpSpPr>
       <p:sp>
         <p:nvSpPr>
-          <p:cNvPr id="2" name="Заголовок 1">
-            <a:extLst>
-              <a:ext uri="{FF2B5EF4-FFF2-40B4-BE49-F238E27FC236}">
-                <a16:creationId xmlns:a16="http://schemas.microsoft.com/office/drawing/2014/main" id="{1DE27666-E51B-953A-4853-A4286175F271}"/>
+          <p:cNvPr id="2" name="Title 1">
+            <a:extLst>
+              <a:ext uri="{FF2B5EF4-FFF2-40B4-BE49-F238E27FC236}">
+                <a16:creationId xmlns:a16="http://schemas.microsoft.com/office/drawing/2014/main" id="{4CE98681-217C-3CF2-1CBF-83D487A0B2D9}"/>
               </a:ext>
             </a:extLst>
           </p:cNvPr>
@@ -2185,18 +2201,19 @@
           </a:lstStyle>
           <a:p>
             <a:r>
-              <a:rPr lang="ru-RU"/>
-              <a:t>Образец заголовка</a:t>
-            </a:r>
-          </a:p>
-        </p:txBody>
-      </p:sp>
-      <p:sp>
-        <p:nvSpPr>
-          <p:cNvPr id="3" name="Объект 2">
-            <a:extLst>
-              <a:ext uri="{FF2B5EF4-FFF2-40B4-BE49-F238E27FC236}">
-                <a16:creationId xmlns:a16="http://schemas.microsoft.com/office/drawing/2014/main" id="{BCEDB095-477D-36E0-C08E-89CF5A8AEE0A}"/>
+              <a:rPr lang="en-US"/>
+              <a:t>Click to edit Master title style</a:t>
+            </a:r>
+            <a:endParaRPr lang="ru-RU"/>
+          </a:p>
+        </p:txBody>
+      </p:sp>
+      <p:sp>
+        <p:nvSpPr>
+          <p:cNvPr id="3" name="Content Placeholder 2">
+            <a:extLst>
+              <a:ext uri="{FF2B5EF4-FFF2-40B4-BE49-F238E27FC236}">
+                <a16:creationId xmlns:a16="http://schemas.microsoft.com/office/drawing/2014/main" id="{571BC3FA-836B-89CF-1AB9-5BDF051C66C6}"/>
               </a:ext>
             </a:extLst>
           </p:cNvPr>
@@ -2247,46 +2264,47 @@
           <a:p>
             <a:pPr lvl="0"/>
             <a:r>
-              <a:rPr lang="ru-RU"/>
-              <a:t>Образец текста</a:t>
+              <a:rPr lang="en-US"/>
+              <a:t>Click to edit Master text styles</a:t>
             </a:r>
           </a:p>
           <a:p>
             <a:pPr lvl="1"/>
             <a:r>
-              <a:rPr lang="ru-RU"/>
-              <a:t>Второй уровень</a:t>
+              <a:rPr lang="en-US"/>
+              <a:t>Second level</a:t>
             </a:r>
           </a:p>
           <a:p>
             <a:pPr lvl="2"/>
             <a:r>
-              <a:rPr lang="ru-RU"/>
-              <a:t>Третий уровень</a:t>
+              <a:rPr lang="en-US"/>
+              <a:t>Third level</a:t>
             </a:r>
           </a:p>
           <a:p>
             <a:pPr lvl="3"/>
             <a:r>
-              <a:rPr lang="ru-RU"/>
-              <a:t>Четвертый уровень</a:t>
+              <a:rPr lang="en-US"/>
+              <a:t>Fourth level</a:t>
             </a:r>
           </a:p>
           <a:p>
             <a:pPr lvl="4"/>
             <a:r>
-              <a:rPr lang="ru-RU"/>
-              <a:t>Пятый уровень</a:t>
-            </a:r>
-          </a:p>
-        </p:txBody>
-      </p:sp>
-      <p:sp>
-        <p:nvSpPr>
-          <p:cNvPr id="4" name="Текст 3">
-            <a:extLst>
-              <a:ext uri="{FF2B5EF4-FFF2-40B4-BE49-F238E27FC236}">
-                <a16:creationId xmlns:a16="http://schemas.microsoft.com/office/drawing/2014/main" id="{623BDE6B-F052-799E-4F4E-FB2633298980}"/>
+              <a:rPr lang="en-US"/>
+              <a:t>Fifth level</a:t>
+            </a:r>
+            <a:endParaRPr lang="ru-RU"/>
+          </a:p>
+        </p:txBody>
+      </p:sp>
+      <p:sp>
+        <p:nvSpPr>
+          <p:cNvPr id="4" name="Text Placeholder 3">
+            <a:extLst>
+              <a:ext uri="{FF2B5EF4-FFF2-40B4-BE49-F238E27FC236}">
+                <a16:creationId xmlns:a16="http://schemas.microsoft.com/office/drawing/2014/main" id="{DB48C85E-CE7B-7213-DD11-4AD279229F81}"/>
               </a:ext>
             </a:extLst>
           </p:cNvPr>
@@ -2346,18 +2364,18 @@
           <a:p>
             <a:pPr lvl="0"/>
             <a:r>
-              <a:rPr lang="ru-RU"/>
-              <a:t>Образец текста</a:t>
-            </a:r>
-          </a:p>
-        </p:txBody>
-      </p:sp>
-      <p:sp>
-        <p:nvSpPr>
-          <p:cNvPr id="5" name="Дата 4">
-            <a:extLst>
-              <a:ext uri="{FF2B5EF4-FFF2-40B4-BE49-F238E27FC236}">
-                <a16:creationId xmlns:a16="http://schemas.microsoft.com/office/drawing/2014/main" id="{0DAE8F71-2998-2109-06EE-465E2B4E5BF5}"/>
+              <a:rPr lang="en-US"/>
+              <a:t>Click to edit Master text styles</a:t>
+            </a:r>
+          </a:p>
+        </p:txBody>
+      </p:sp>
+      <p:sp>
+        <p:nvSpPr>
+          <p:cNvPr id="5" name="Date Placeholder 4">
+            <a:extLst>
+              <a:ext uri="{FF2B5EF4-FFF2-40B4-BE49-F238E27FC236}">
+                <a16:creationId xmlns:a16="http://schemas.microsoft.com/office/drawing/2014/main" id="{CF9693FD-555D-EED6-7521-C5E5C09E09ED}"/>
               </a:ext>
             </a:extLst>
           </p:cNvPr>
@@ -2373,9 +2391,9 @@
           <a:bodyPr/>
           <a:lstStyle/>
           <a:p>
-            <a:fld id="{9757B1A7-0FDC-40C9-B67F-A43EAC5AEB09}" type="datetimeFigureOut">
+            <a:fld id="{961A2009-0CEE-41C1-939A-B9C723B78133}" type="datetimeFigureOut">
               <a:rPr lang="ru-RU" smtClean="0"/>
-              <a:t>04.02.2026</a:t>
+              <a:t>05.03.2026</a:t>
             </a:fld>
             <a:endParaRPr lang="ru-RU"/>
           </a:p>
@@ -2383,10 +2401,10 @@
       </p:sp>
       <p:sp>
         <p:nvSpPr>
-          <p:cNvPr id="6" name="Нижний колонтитул 5">
-            <a:extLst>
-              <a:ext uri="{FF2B5EF4-FFF2-40B4-BE49-F238E27FC236}">
-                <a16:creationId xmlns:a16="http://schemas.microsoft.com/office/drawing/2014/main" id="{EE72EDA9-A6EA-E840-F542-5F2BBF1B9D4C}"/>
+          <p:cNvPr id="6" name="Footer Placeholder 5">
+            <a:extLst>
+              <a:ext uri="{FF2B5EF4-FFF2-40B4-BE49-F238E27FC236}">
+                <a16:creationId xmlns:a16="http://schemas.microsoft.com/office/drawing/2014/main" id="{217535D9-8FB8-5200-D756-907988077B80}"/>
               </a:ext>
             </a:extLst>
           </p:cNvPr>
@@ -2408,10 +2426,10 @@
       </p:sp>
       <p:sp>
         <p:nvSpPr>
-          <p:cNvPr id="7" name="Номер слайда 6">
-            <a:extLst>
-              <a:ext uri="{FF2B5EF4-FFF2-40B4-BE49-F238E27FC236}">
-                <a16:creationId xmlns:a16="http://schemas.microsoft.com/office/drawing/2014/main" id="{314370C1-CA3F-6E8B-01D0-CC3665606AF7}"/>
+          <p:cNvPr id="7" name="Slide Number Placeholder 6">
+            <a:extLst>
+              <a:ext uri="{FF2B5EF4-FFF2-40B4-BE49-F238E27FC236}">
+                <a16:creationId xmlns:a16="http://schemas.microsoft.com/office/drawing/2014/main" id="{38875E0F-D389-BB65-C7E7-B04BCA36DC9B}"/>
               </a:ext>
             </a:extLst>
           </p:cNvPr>
@@ -2427,7 +2445,7 @@
           <a:bodyPr/>
           <a:lstStyle/>
           <a:p>
-            <a:fld id="{42D7F972-A93D-42B4-85D0-25743E08EB40}" type="slidenum">
+            <a:fld id="{20CA96BB-6BF3-4E52-BE21-7A7A15C0727C}" type="slidenum">
               <a:rPr lang="ru-RU" smtClean="0"/>
               <a:t>‹#›</a:t>
             </a:fld>
@@ -2438,7 +2456,7 @@
     </p:spTree>
     <p:extLst>
       <p:ext uri="{BB962C8B-B14F-4D97-AF65-F5344CB8AC3E}">
-        <p14:creationId xmlns:p14="http://schemas.microsoft.com/office/powerpoint/2010/main" val="1135905457"/>
+        <p14:creationId xmlns:p14="http://schemas.microsoft.com/office/powerpoint/2010/main" val="2527503941"/>
       </p:ext>
     </p:extLst>
   </p:cSld>
@@ -2450,7 +2468,7 @@
 
 <file path=ppt/slideLayouts/slideLayout9.xml><?xml version="1.0" encoding="utf-8"?>
 <p:sldLayout xmlns:a="http://schemas.openxmlformats.org/drawingml/2006/main" xmlns:r="http://schemas.openxmlformats.org/officeDocument/2006/relationships" xmlns:p="http://schemas.openxmlformats.org/presentationml/2006/main" type="picTx" preserve="1">
-  <p:cSld name="Рисунок с подписью">
+  <p:cSld name="Picture with Caption">
     <p:spTree>
       <p:nvGrpSpPr>
         <p:cNvPr id="1" name=""/>
@@ -2467,10 +2485,10 @@
       </p:grpSpPr>
       <p:sp>
         <p:nvSpPr>
-          <p:cNvPr id="2" name="Заголовок 1">
-            <a:extLst>
-              <a:ext uri="{FF2B5EF4-FFF2-40B4-BE49-F238E27FC236}">
-                <a16:creationId xmlns:a16="http://schemas.microsoft.com/office/drawing/2014/main" id="{DD54BC52-FE78-BEE1-7B8E-8435C42CFF62}"/>
+          <p:cNvPr id="2" name="Title 1">
+            <a:extLst>
+              <a:ext uri="{FF2B5EF4-FFF2-40B4-BE49-F238E27FC236}">
+                <a16:creationId xmlns:a16="http://schemas.microsoft.com/office/drawing/2014/main" id="{0218E2C7-ED13-206D-9357-357009C8EA42}"/>
               </a:ext>
             </a:extLst>
           </p:cNvPr>
@@ -2496,18 +2514,19 @@
           </a:lstStyle>
           <a:p>
             <a:r>
-              <a:rPr lang="ru-RU"/>
-              <a:t>Образец заголовка</a:t>
-            </a:r>
-          </a:p>
-        </p:txBody>
-      </p:sp>
-      <p:sp>
-        <p:nvSpPr>
-          <p:cNvPr id="3" name="Рисунок 2">
-            <a:extLst>
-              <a:ext uri="{FF2B5EF4-FFF2-40B4-BE49-F238E27FC236}">
-                <a16:creationId xmlns:a16="http://schemas.microsoft.com/office/drawing/2014/main" id="{1BD269C9-E65F-7FCD-66A5-E5E386896106}"/>
+              <a:rPr lang="en-US"/>
+              <a:t>Click to edit Master title style</a:t>
+            </a:r>
+            <a:endParaRPr lang="ru-RU"/>
+          </a:p>
+        </p:txBody>
+      </p:sp>
+      <p:sp>
+        <p:nvSpPr>
+          <p:cNvPr id="3" name="Picture Placeholder 2">
+            <a:extLst>
+              <a:ext uri="{FF2B5EF4-FFF2-40B4-BE49-F238E27FC236}">
+                <a16:creationId xmlns:a16="http://schemas.microsoft.com/office/drawing/2014/main" id="{CF0BC659-B165-5621-45DF-BAE304B61952}"/>
               </a:ext>
             </a:extLst>
           </p:cNvPr>
@@ -2571,10 +2590,10 @@
       </p:sp>
       <p:sp>
         <p:nvSpPr>
-          <p:cNvPr id="4" name="Текст 3">
-            <a:extLst>
-              <a:ext uri="{FF2B5EF4-FFF2-40B4-BE49-F238E27FC236}">
-                <a16:creationId xmlns:a16="http://schemas.microsoft.com/office/drawing/2014/main" id="{86880BC9-5579-B95C-D785-5C58CC3A4A0F}"/>
+          <p:cNvPr id="4" name="Text Placeholder 3">
+            <a:extLst>
+              <a:ext uri="{FF2B5EF4-FFF2-40B4-BE49-F238E27FC236}">
+                <a16:creationId xmlns:a16="http://schemas.microsoft.com/office/drawing/2014/main" id="{5F0B0D94-F135-2B1F-1FC9-84ED17DEB08C}"/>
               </a:ext>
             </a:extLst>
           </p:cNvPr>
@@ -2634,18 +2653,18 @@
           <a:p>
             <a:pPr lvl="0"/>
             <a:r>
-              <a:rPr lang="ru-RU"/>
-              <a:t>Образец текста</a:t>
-            </a:r>
-          </a:p>
-        </p:txBody>
-      </p:sp>
-      <p:sp>
-        <p:nvSpPr>
-          <p:cNvPr id="5" name="Дата 4">
-            <a:extLst>
-              <a:ext uri="{FF2B5EF4-FFF2-40B4-BE49-F238E27FC236}">
-                <a16:creationId xmlns:a16="http://schemas.microsoft.com/office/drawing/2014/main" id="{2736DD76-FEAD-D603-6FB6-2CC6B872DAC5}"/>
+              <a:rPr lang="en-US"/>
+              <a:t>Click to edit Master text styles</a:t>
+            </a:r>
+          </a:p>
+        </p:txBody>
+      </p:sp>
+      <p:sp>
+        <p:nvSpPr>
+          <p:cNvPr id="5" name="Date Placeholder 4">
+            <a:extLst>
+              <a:ext uri="{FF2B5EF4-FFF2-40B4-BE49-F238E27FC236}">
+                <a16:creationId xmlns:a16="http://schemas.microsoft.com/office/drawing/2014/main" id="{7F6DC1A2-030A-FE0C-0C00-5E8BE8A225D8}"/>
               </a:ext>
             </a:extLst>
           </p:cNvPr>
@@ -2661,9 +2680,9 @@
           <a:bodyPr/>
           <a:lstStyle/>
           <a:p>
-            <a:fld id="{9757B1A7-0FDC-40C9-B67F-A43EAC5AEB09}" type="datetimeFigureOut">
+            <a:fld id="{961A2009-0CEE-41C1-939A-B9C723B78133}" type="datetimeFigureOut">
               <a:rPr lang="ru-RU" smtClean="0"/>
-              <a:t>04.02.2026</a:t>
+              <a:t>05.03.2026</a:t>
             </a:fld>
             <a:endParaRPr lang="ru-RU"/>
           </a:p>
@@ -2671,10 +2690,10 @@
       </p:sp>
       <p:sp>
         <p:nvSpPr>
-          <p:cNvPr id="6" name="Нижний колонтитул 5">
-            <a:extLst>
-              <a:ext uri="{FF2B5EF4-FFF2-40B4-BE49-F238E27FC236}">
-                <a16:creationId xmlns:a16="http://schemas.microsoft.com/office/drawing/2014/main" id="{F010FA7A-0A14-3814-BFA9-88C08D20F106}"/>
+          <p:cNvPr id="6" name="Footer Placeholder 5">
+            <a:extLst>
+              <a:ext uri="{FF2B5EF4-FFF2-40B4-BE49-F238E27FC236}">
+                <a16:creationId xmlns:a16="http://schemas.microsoft.com/office/drawing/2014/main" id="{82FD8063-CB8E-3AE3-4234-1A7D37DD9201}"/>
               </a:ext>
             </a:extLst>
           </p:cNvPr>
@@ -2696,10 +2715,10 @@
       </p:sp>
       <p:sp>
         <p:nvSpPr>
-          <p:cNvPr id="7" name="Номер слайда 6">
-            <a:extLst>
-              <a:ext uri="{FF2B5EF4-FFF2-40B4-BE49-F238E27FC236}">
-                <a16:creationId xmlns:a16="http://schemas.microsoft.com/office/drawing/2014/main" id="{40E478F9-C8B7-6D46-AAAA-482FDE086C30}"/>
+          <p:cNvPr id="7" name="Slide Number Placeholder 6">
+            <a:extLst>
+              <a:ext uri="{FF2B5EF4-FFF2-40B4-BE49-F238E27FC236}">
+                <a16:creationId xmlns:a16="http://schemas.microsoft.com/office/drawing/2014/main" id="{866BA33C-BB80-BF46-F329-7D49E95D05B5}"/>
               </a:ext>
             </a:extLst>
           </p:cNvPr>
@@ -2715,7 +2734,7 @@
           <a:bodyPr/>
           <a:lstStyle/>
           <a:p>
-            <a:fld id="{42D7F972-A93D-42B4-85D0-25743E08EB40}" type="slidenum">
+            <a:fld id="{20CA96BB-6BF3-4E52-BE21-7A7A15C0727C}" type="slidenum">
               <a:rPr lang="ru-RU" smtClean="0"/>
               <a:t>‹#›</a:t>
             </a:fld>
@@ -2726,7 +2745,7 @@
     </p:spTree>
     <p:extLst>
       <p:ext uri="{BB962C8B-B14F-4D97-AF65-F5344CB8AC3E}">
-        <p14:creationId xmlns:p14="http://schemas.microsoft.com/office/powerpoint/2010/main" val="1468998930"/>
+        <p14:creationId xmlns:p14="http://schemas.microsoft.com/office/powerpoint/2010/main" val="1941709509"/>
       </p:ext>
     </p:extLst>
   </p:cSld>
@@ -2760,10 +2779,10 @@
       </p:grpSpPr>
       <p:sp>
         <p:nvSpPr>
-          <p:cNvPr id="2" name="Заголовок 1">
-            <a:extLst>
-              <a:ext uri="{FF2B5EF4-FFF2-40B4-BE49-F238E27FC236}">
-                <a16:creationId xmlns:a16="http://schemas.microsoft.com/office/drawing/2014/main" id="{749D9B31-6718-4D0C-A840-3A4A4C94FA6B}"/>
+          <p:cNvPr id="2" name="Title Placeholder 1">
+            <a:extLst>
+              <a:ext uri="{FF2B5EF4-FFF2-40B4-BE49-F238E27FC236}">
+                <a16:creationId xmlns:a16="http://schemas.microsoft.com/office/drawing/2014/main" id="{06FBB2AE-525E-7CCA-93BA-D8C9D71A6E8B}"/>
               </a:ext>
             </a:extLst>
           </p:cNvPr>
@@ -2790,18 +2809,19 @@
           <a:lstStyle/>
           <a:p>
             <a:r>
-              <a:rPr lang="ru-RU"/>
-              <a:t>Образец заголовка</a:t>
-            </a:r>
-          </a:p>
-        </p:txBody>
-      </p:sp>
-      <p:sp>
-        <p:nvSpPr>
-          <p:cNvPr id="3" name="Текст 2">
-            <a:extLst>
-              <a:ext uri="{FF2B5EF4-FFF2-40B4-BE49-F238E27FC236}">
-                <a16:creationId xmlns:a16="http://schemas.microsoft.com/office/drawing/2014/main" id="{B1D7B4FD-0B6C-881B-A500-1BCF6223C85D}"/>
+              <a:rPr lang="en-US"/>
+              <a:t>Click to edit Master title style</a:t>
+            </a:r>
+            <a:endParaRPr lang="ru-RU"/>
+          </a:p>
+        </p:txBody>
+      </p:sp>
+      <p:sp>
+        <p:nvSpPr>
+          <p:cNvPr id="3" name="Text Placeholder 2">
+            <a:extLst>
+              <a:ext uri="{FF2B5EF4-FFF2-40B4-BE49-F238E27FC236}">
+                <a16:creationId xmlns:a16="http://schemas.microsoft.com/office/drawing/2014/main" id="{67DFA169-C654-D5F6-6588-5CD8790373F5}"/>
               </a:ext>
             </a:extLst>
           </p:cNvPr>
@@ -2829,46 +2849,47 @@
           <a:p>
             <a:pPr lvl="0"/>
             <a:r>
-              <a:rPr lang="ru-RU"/>
-              <a:t>Образец текста</a:t>
+              <a:rPr lang="en-US"/>
+              <a:t>Click to edit Master text styles</a:t>
             </a:r>
           </a:p>
           <a:p>
             <a:pPr lvl="1"/>
             <a:r>
-              <a:rPr lang="ru-RU"/>
-              <a:t>Второй уровень</a:t>
+              <a:rPr lang="en-US"/>
+              <a:t>Second level</a:t>
             </a:r>
           </a:p>
           <a:p>
             <a:pPr lvl="2"/>
             <a:r>
-              <a:rPr lang="ru-RU"/>
-              <a:t>Третий уровень</a:t>
+              <a:rPr lang="en-US"/>
+              <a:t>Third level</a:t>
             </a:r>
           </a:p>
           <a:p>
             <a:pPr lvl="3"/>
             <a:r>
-              <a:rPr lang="ru-RU"/>
-              <a:t>Четвертый уровень</a:t>
+              <a:rPr lang="en-US"/>
+              <a:t>Fourth level</a:t>
             </a:r>
           </a:p>
           <a:p>
             <a:pPr lvl="4"/>
             <a:r>
-              <a:rPr lang="ru-RU"/>
-              <a:t>Пятый уровень</a:t>
-            </a:r>
-          </a:p>
-        </p:txBody>
-      </p:sp>
-      <p:sp>
-        <p:nvSpPr>
-          <p:cNvPr id="4" name="Дата 3">
-            <a:extLst>
-              <a:ext uri="{FF2B5EF4-FFF2-40B4-BE49-F238E27FC236}">
-                <a16:creationId xmlns:a16="http://schemas.microsoft.com/office/drawing/2014/main" id="{45002596-66F9-503B-31AA-E09879AF502D}"/>
+              <a:rPr lang="en-US"/>
+              <a:t>Fifth level</a:t>
+            </a:r>
+            <a:endParaRPr lang="ru-RU"/>
+          </a:p>
+        </p:txBody>
+      </p:sp>
+      <p:sp>
+        <p:nvSpPr>
+          <p:cNvPr id="4" name="Date Placeholder 3">
+            <a:extLst>
+              <a:ext uri="{FF2B5EF4-FFF2-40B4-BE49-F238E27FC236}">
+                <a16:creationId xmlns:a16="http://schemas.microsoft.com/office/drawing/2014/main" id="{2D865572-007F-BCB6-C95A-0F9EA0E8BEA6}"/>
               </a:ext>
             </a:extLst>
           </p:cNvPr>
@@ -2895,16 +2916,16 @@
               <a:defRPr sz="1200">
                 <a:solidFill>
                   <a:schemeClr val="tx1">
-                    <a:tint val="75000"/>
+                    <a:tint val="82000"/>
                   </a:schemeClr>
                 </a:solidFill>
               </a:defRPr>
             </a:lvl1pPr>
           </a:lstStyle>
           <a:p>
-            <a:fld id="{9757B1A7-0FDC-40C9-B67F-A43EAC5AEB09}" type="datetimeFigureOut">
+            <a:fld id="{961A2009-0CEE-41C1-939A-B9C723B78133}" type="datetimeFigureOut">
               <a:rPr lang="ru-RU" smtClean="0"/>
-              <a:t>04.02.2026</a:t>
+              <a:t>05.03.2026</a:t>
             </a:fld>
             <a:endParaRPr lang="ru-RU"/>
           </a:p>
@@ -2912,10 +2933,10 @@
       </p:sp>
       <p:sp>
         <p:nvSpPr>
-          <p:cNvPr id="5" name="Нижний колонтитул 4">
-            <a:extLst>
-              <a:ext uri="{FF2B5EF4-FFF2-40B4-BE49-F238E27FC236}">
-                <a16:creationId xmlns:a16="http://schemas.microsoft.com/office/drawing/2014/main" id="{1A7E95C6-2D43-6725-4E98-7A7F46451A77}"/>
+          <p:cNvPr id="5" name="Footer Placeholder 4">
+            <a:extLst>
+              <a:ext uri="{FF2B5EF4-FFF2-40B4-BE49-F238E27FC236}">
+                <a16:creationId xmlns:a16="http://schemas.microsoft.com/office/drawing/2014/main" id="{C3C2D9C5-0B41-1C6E-3AE9-7EAFABB1D0CE}"/>
               </a:ext>
             </a:extLst>
           </p:cNvPr>
@@ -2942,7 +2963,7 @@
               <a:defRPr sz="1200">
                 <a:solidFill>
                   <a:schemeClr val="tx1">
-                    <a:tint val="75000"/>
+                    <a:tint val="82000"/>
                   </a:schemeClr>
                 </a:solidFill>
               </a:defRPr>
@@ -2955,10 +2976,10 @@
       </p:sp>
       <p:sp>
         <p:nvSpPr>
-          <p:cNvPr id="6" name="Номер слайда 5">
-            <a:extLst>
-              <a:ext uri="{FF2B5EF4-FFF2-40B4-BE49-F238E27FC236}">
-                <a16:creationId xmlns:a16="http://schemas.microsoft.com/office/drawing/2014/main" id="{31D286F6-6E8E-C632-9EC1-86635101D1FE}"/>
+          <p:cNvPr id="6" name="Slide Number Placeholder 5">
+            <a:extLst>
+              <a:ext uri="{FF2B5EF4-FFF2-40B4-BE49-F238E27FC236}">
+                <a16:creationId xmlns:a16="http://schemas.microsoft.com/office/drawing/2014/main" id="{C3CF974B-20B7-4F1A-F8DB-7F358E5133FF}"/>
               </a:ext>
             </a:extLst>
           </p:cNvPr>
@@ -2985,14 +3006,14 @@
               <a:defRPr sz="1200">
                 <a:solidFill>
                   <a:schemeClr val="tx1">
-                    <a:tint val="75000"/>
+                    <a:tint val="82000"/>
                   </a:schemeClr>
                 </a:solidFill>
               </a:defRPr>
             </a:lvl1pPr>
           </a:lstStyle>
           <a:p>
-            <a:fld id="{42D7F972-A93D-42B4-85D0-25743E08EB40}" type="slidenum">
+            <a:fld id="{20CA96BB-6BF3-4E52-BE21-7A7A15C0727C}" type="slidenum">
               <a:rPr lang="ru-RU" smtClean="0"/>
               <a:t>‹#›</a:t>
             </a:fld>
@@ -3003,7 +3024,7 @@
     </p:spTree>
     <p:extLst>
       <p:ext uri="{BB962C8B-B14F-4D97-AF65-F5344CB8AC3E}">
-        <p14:creationId xmlns:p14="http://schemas.microsoft.com/office/powerpoint/2010/main" val="980976171"/>
+        <p14:creationId xmlns:p14="http://schemas.microsoft.com/office/powerpoint/2010/main" val="223362461"/>
       </p:ext>
     </p:extLst>
   </p:cSld>
@@ -3323,10 +3344,10 @@
       </p:grpSpPr>
       <p:sp>
         <p:nvSpPr>
-          <p:cNvPr id="2" name="Заголовок 1">
-            <a:extLst>
-              <a:ext uri="{FF2B5EF4-FFF2-40B4-BE49-F238E27FC236}">
-                <a16:creationId xmlns:a16="http://schemas.microsoft.com/office/drawing/2014/main" id="{356D6F75-25DD-E288-5FF1-36D6AA9A2826}"/>
+          <p:cNvPr id="2" name="Title 1">
+            <a:extLst>
+              <a:ext uri="{FF2B5EF4-FFF2-40B4-BE49-F238E27FC236}">
+                <a16:creationId xmlns:a16="http://schemas.microsoft.com/office/drawing/2014/main" id="{8CADC51B-0416-BB8E-AEB5-3D1BBB64ACED}"/>
               </a:ext>
             </a:extLst>
           </p:cNvPr>
@@ -3342,16 +3363,16 @@
           <a:bodyPr/>
           <a:lstStyle/>
           <a:p>
-            <a:endParaRPr lang="ru-RU" dirty="0"/>
-          </a:p>
-        </p:txBody>
-      </p:sp>
-      <p:sp>
-        <p:nvSpPr>
-          <p:cNvPr id="3" name="Подзаголовок 2">
-            <a:extLst>
-              <a:ext uri="{FF2B5EF4-FFF2-40B4-BE49-F238E27FC236}">
-                <a16:creationId xmlns:a16="http://schemas.microsoft.com/office/drawing/2014/main" id="{45152EA4-116E-D6E2-4795-AAD70D803A8E}"/>
+            <a:endParaRPr lang="ru-RU"/>
+          </a:p>
+        </p:txBody>
+      </p:sp>
+      <p:sp>
+        <p:nvSpPr>
+          <p:cNvPr id="3" name="Subtitle 2">
+            <a:extLst>
+              <a:ext uri="{FF2B5EF4-FFF2-40B4-BE49-F238E27FC236}">
+                <a16:creationId xmlns:a16="http://schemas.microsoft.com/office/drawing/2014/main" id="{FB50E8CD-A314-35A4-F259-7EA4041DB80B}"/>
               </a:ext>
             </a:extLst>
           </p:cNvPr>
@@ -3374,7 +3395,7 @@
     </p:spTree>
     <p:extLst>
       <p:ext uri="{BB962C8B-B14F-4D97-AF65-F5344CB8AC3E}">
-        <p14:creationId xmlns:p14="http://schemas.microsoft.com/office/powerpoint/2010/main" val="3660602045"/>
+        <p14:creationId xmlns:p14="http://schemas.microsoft.com/office/powerpoint/2010/main" val="2517044419"/>
       </p:ext>
     </p:extLst>
   </p:cSld>
@@ -3385,9 +3406,9 @@
 </file>
 
 <file path=ppt/theme/theme1.xml><?xml version="1.0" encoding="utf-8"?>
-<a:theme xmlns:a="http://schemas.openxmlformats.org/drawingml/2006/main" name="Тема Office">
+<a:theme xmlns:a="http://schemas.openxmlformats.org/drawingml/2006/main" name="Office Theme">
   <a:themeElements>
-    <a:clrScheme name="Стандартная">
+    <a:clrScheme name="Office">
       <a:dk1>
         <a:sysClr val="windowText" lastClr="000000"/>
       </a:dk1>
@@ -3395,39 +3416,39 @@
         <a:sysClr val="window" lastClr="FFFFFF"/>
       </a:lt1>
       <a:dk2>
-        <a:srgbClr val="44546A"/>
+        <a:srgbClr val="0E2841"/>
       </a:dk2>
       <a:lt2>
-        <a:srgbClr val="E7E6E6"/>
+        <a:srgbClr val="E8E8E8"/>
       </a:lt2>
       <a:accent1>
-        <a:srgbClr val="4472C4"/>
+        <a:srgbClr val="156082"/>
       </a:accent1>
       <a:accent2>
-        <a:srgbClr val="ED7D31"/>
+        <a:srgbClr val="E97132"/>
       </a:accent2>
       <a:accent3>
-        <a:srgbClr val="A5A5A5"/>
+        <a:srgbClr val="196B24"/>
       </a:accent3>
       <a:accent4>
-        <a:srgbClr val="FFC000"/>
+        <a:srgbClr val="0F9ED5"/>
       </a:accent4>
       <a:accent5>
-        <a:srgbClr val="5B9BD5"/>
+        <a:srgbClr val="A02B93"/>
       </a:accent5>
       <a:accent6>
-        <a:srgbClr val="70AD47"/>
+        <a:srgbClr val="4EA72E"/>
       </a:accent6>
       <a:hlink>
-        <a:srgbClr val="0563C1"/>
+        <a:srgbClr val="467886"/>
       </a:hlink>
       <a:folHlink>
-        <a:srgbClr val="954F72"/>
+        <a:srgbClr val="96607D"/>
       </a:folHlink>
     </a:clrScheme>
-    <a:fontScheme name="Стандартная">
+    <a:fontScheme name="Office">
       <a:majorFont>
-        <a:latin typeface="Calibri Light" panose="020F0302020204030204"/>
+        <a:latin typeface="Aptos Display" panose="02110004020202020204"/>
         <a:ea typeface=""/>
         <a:cs typeface=""/>
         <a:font script="Jpan" typeface="游ゴシック Light"/>
@@ -3479,7 +3500,7 @@
         <a:font script="Tfng" typeface="Ebrima"/>
       </a:majorFont>
       <a:minorFont>
-        <a:latin typeface="Calibri" panose="020F0502020204030204"/>
+        <a:latin typeface="Aptos" panose="02110004020202020204"/>
         <a:ea typeface=""/>
         <a:cs typeface=""/>
         <a:font script="Jpan" typeface="游ゴシック"/>
@@ -3531,7 +3552,7 @@
         <a:font script="Tfng" typeface="Ebrima"/>
       </a:minorFont>
     </a:fontScheme>
-    <a:fmtScheme name="Стандартная">
+    <a:fmtScheme name="Office">
       <a:fillStyleLst>
         <a:solidFill>
           <a:schemeClr val="phClr"/>
@@ -3590,13 +3611,6 @@
         </a:gradFill>
       </a:fillStyleLst>
       <a:lnStyleLst>
-        <a:ln w="6350" cap="flat" cmpd="sng" algn="ctr">
-          <a:solidFill>
-            <a:schemeClr val="phClr"/>
-          </a:solidFill>
-          <a:prstDash val="solid"/>
-          <a:miter lim="800000"/>
-        </a:ln>
         <a:ln w="12700" cap="flat" cmpd="sng" algn="ctr">
           <a:solidFill>
             <a:schemeClr val="phClr"/>
@@ -3605,6 +3619,13 @@
           <a:miter lim="800000"/>
         </a:ln>
         <a:ln w="19050" cap="flat" cmpd="sng" algn="ctr">
+          <a:solidFill>
+            <a:schemeClr val="phClr"/>
+          </a:solidFill>
+          <a:prstDash val="solid"/>
+          <a:miter lim="800000"/>
+        </a:ln>
+        <a:ln w="25400" cap="flat" cmpd="sng" algn="ctr">
           <a:solidFill>
             <a:schemeClr val="phClr"/>
           </a:solidFill>
@@ -3669,11 +3690,31 @@
       </a:bgFillStyleLst>
     </a:fmtScheme>
   </a:themeElements>
-  <a:objectDefaults/>
+  <a:objectDefaults>
+    <a:lnDef>
+      <a:spPr/>
+      <a:bodyPr/>
+      <a:lstStyle/>
+      <a:style>
+        <a:lnRef idx="2">
+          <a:schemeClr val="accent1"/>
+        </a:lnRef>
+        <a:fillRef idx="0">
+          <a:schemeClr val="accent1"/>
+        </a:fillRef>
+        <a:effectRef idx="1">
+          <a:schemeClr val="accent1"/>
+        </a:effectRef>
+        <a:fontRef idx="minor">
+          <a:schemeClr val="tx1"/>
+        </a:fontRef>
+      </a:style>
+    </a:lnDef>
+  </a:objectDefaults>
   <a:extraClrSchemeLst/>
   <a:extLst>
     <a:ext uri="{05A4C25C-085E-4340-85A3-A5531E510DB2}">
-      <thm15:themeFamily xmlns:thm15="http://schemas.microsoft.com/office/thememl/2012/main" name="Office Theme" id="{62F939B6-93AF-4DB8-9C6B-D6C7DFDC589F}" vid="{4A3C46E8-61CC-4603-A589-7422A47A8E4A}"/>
+      <thm15:themeFamily xmlns:thm15="http://schemas.microsoft.com/office/thememl/2012/main" name="Office Theme" id="{2E142A2C-CD16-42D6-873A-C26D2A0506FA}" vid="{1BDDFF52-6CD6-40A5-AB3C-68EB2F1E4D0A}"/>
     </a:ext>
   </a:extLst>
 </a:theme>

--- a/aspose/slides_foss/_internal/pptx/Template.pptx
+++ b/aspose/slides_foss/_internal/pptx/Template.pptx
@@ -3342,56 +3342,6 @@
           <a:chExt cx="0" cy="0"/>
         </a:xfrm>
       </p:grpSpPr>
-      <p:sp>
-        <p:nvSpPr>
-          <p:cNvPr id="2" name="Title 1">
-            <a:extLst>
-              <a:ext uri="{FF2B5EF4-FFF2-40B4-BE49-F238E27FC236}">
-                <a16:creationId xmlns:a16="http://schemas.microsoft.com/office/drawing/2014/main" id="{8CADC51B-0416-BB8E-AEB5-3D1BBB64ACED}"/>
-              </a:ext>
-            </a:extLst>
-          </p:cNvPr>
-          <p:cNvSpPr>
-            <a:spLocks noGrp="1"/>
-          </p:cNvSpPr>
-          <p:nvPr>
-            <p:ph type="ctrTitle"/>
-          </p:nvPr>
-        </p:nvSpPr>
-        <p:spPr/>
-        <p:txBody>
-          <a:bodyPr/>
-          <a:lstStyle/>
-          <a:p>
-            <a:endParaRPr lang="ru-RU"/>
-          </a:p>
-        </p:txBody>
-      </p:sp>
-      <p:sp>
-        <p:nvSpPr>
-          <p:cNvPr id="3" name="Subtitle 2">
-            <a:extLst>
-              <a:ext uri="{FF2B5EF4-FFF2-40B4-BE49-F238E27FC236}">
-                <a16:creationId xmlns:a16="http://schemas.microsoft.com/office/drawing/2014/main" id="{FB50E8CD-A314-35A4-F259-7EA4041DB80B}"/>
-              </a:ext>
-            </a:extLst>
-          </p:cNvPr>
-          <p:cNvSpPr>
-            <a:spLocks noGrp="1"/>
-          </p:cNvSpPr>
-          <p:nvPr>
-            <p:ph type="subTitle" idx="1"/>
-          </p:nvPr>
-        </p:nvSpPr>
-        <p:spPr/>
-        <p:txBody>
-          <a:bodyPr/>
-          <a:lstStyle/>
-          <a:p>
-            <a:endParaRPr lang="ru-RU"/>
-          </a:p>
-        </p:txBody>
-      </p:sp>
     </p:spTree>
     <p:extLst>
       <p:ext uri="{BB962C8B-B14F-4D97-AF65-F5344CB8AC3E}">
@@ -3654,38 +3604,50 @@
         <a:solidFill>
           <a:schemeClr val="phClr"/>
         </a:solidFill>
-        <a:solidFill>
-          <a:schemeClr val="phClr">
-            <a:tint val="95000"/>
-            <a:satMod val="170000"/>
-          </a:schemeClr>
-        </a:solidFill>
         <a:gradFill rotWithShape="1">
           <a:gsLst>
             <a:gs pos="0">
               <a:schemeClr val="phClr">
-                <a:tint val="93000"/>
-                <a:satMod val="150000"/>
-                <a:shade val="98000"/>
-                <a:lumMod val="102000"/>
+                <a:tint val="40000"/>
+                <a:satMod val="350000"/>
               </a:schemeClr>
             </a:gs>
-            <a:gs pos="50000">
+            <a:gs pos="40000">
               <a:schemeClr val="phClr">
-                <a:tint val="98000"/>
-                <a:satMod val="130000"/>
-                <a:shade val="90000"/>
-                <a:lumMod val="103000"/>
+                <a:tint val="45000"/>
+                <a:shade val="99000"/>
+                <a:satMod val="350000"/>
               </a:schemeClr>
             </a:gs>
             <a:gs pos="100000">
               <a:schemeClr val="phClr">
-                <a:shade val="63000"/>
-                <a:satMod val="120000"/>
+                <a:shade val="20000"/>
+                <a:satMod val="255000"/>
               </a:schemeClr>
             </a:gs>
           </a:gsLst>
-          <a:lin ang="5400000" scaled="0"/>
+          <a:path path="circle">
+            <a:fillToRect l="50000" t="-80000" r="50000" b="180000"/>
+          </a:path>
+        </a:gradFill>
+        <a:gradFill rotWithShape="1">
+          <a:gsLst>
+            <a:gs pos="0">
+              <a:schemeClr val="phClr">
+                <a:tint val="80000"/>
+                <a:satMod val="300000"/>
+              </a:schemeClr>
+            </a:gs>
+            <a:gs pos="100000">
+              <a:schemeClr val="phClr">
+                <a:shade val="30000"/>
+                <a:satMod val="200000"/>
+              </a:schemeClr>
+            </a:gs>
+          </a:gsLst>
+          <a:path path="circle">
+            <a:fillToRect l="50000" t="50000" r="50000" b="50000"/>
+          </a:path>
         </a:gradFill>
       </a:bgFillStyleLst>
     </a:fmtScheme>

--- a/aspose/slides_foss/_internal/pptx/Template.pptx
+++ b/aspose/slides_foss/_internal/pptx/Template.pptx
@@ -11,7 +11,7 @@
   <p:notesSz cx="6858000" cy="9144000"/>
   <p:defaultTextStyle>
     <a:defPPr>
-      <a:defRPr lang="ru-RU"/>
+      <a:defRPr lang="en-US"/>
     </a:defPPr>
     <a:lvl1pPr marL="0" algn="l" defTabSz="914400" rtl="0" eaLnBrk="1" latinLnBrk="0" hangingPunct="1">
       <a:defRPr sz="1800" kern="1200">
@@ -158,7 +158,7 @@
               <a:rPr lang="en-US"/>
               <a:t>Click to edit Master title style</a:t>
             </a:r>
-            <a:endParaRPr lang="ru-RU"/>
+            <a:endParaRPr lang="en-US"/>
           </a:p>
         </p:txBody>
       </p:sp>
@@ -229,7 +229,7 @@
               <a:rPr lang="en-US"/>
               <a:t>Click to edit Master subtitle style</a:t>
             </a:r>
-            <a:endParaRPr lang="ru-RU"/>
+            <a:endParaRPr lang="en-US"/>
           </a:p>
         </p:txBody>
       </p:sp>
@@ -255,10 +255,10 @@
           <a:lstStyle/>
           <a:p>
             <a:fld id="{961A2009-0CEE-41C1-939A-B9C723B78133}" type="datetimeFigureOut">
-              <a:rPr lang="ru-RU" smtClean="0"/>
+              <a:rPr lang="en-US" smtClean="0"/>
               <a:t>05.03.2026</a:t>
             </a:fld>
-            <a:endParaRPr lang="ru-RU"/>
+            <a:endParaRPr lang="en-US"/>
           </a:p>
         </p:txBody>
       </p:sp>
@@ -283,7 +283,7 @@
           <a:bodyPr/>
           <a:lstStyle/>
           <a:p>
-            <a:endParaRPr lang="ru-RU"/>
+            <a:endParaRPr lang="en-US"/>
           </a:p>
         </p:txBody>
       </p:sp>
@@ -309,10 +309,10 @@
           <a:lstStyle/>
           <a:p>
             <a:fld id="{20CA96BB-6BF3-4E52-BE21-7A7A15C0727C}" type="slidenum">
-              <a:rPr lang="ru-RU" smtClean="0"/>
+              <a:rPr lang="en-US" smtClean="0"/>
               <a:t>‹#›</a:t>
             </a:fld>
-            <a:endParaRPr lang="ru-RU"/>
+            <a:endParaRPr lang="en-US"/>
           </a:p>
         </p:txBody>
       </p:sp>
@@ -371,7 +371,7 @@
               <a:rPr lang="en-US"/>
               <a:t>Click to edit Master title style</a:t>
             </a:r>
-            <a:endParaRPr lang="ru-RU"/>
+            <a:endParaRPr lang="en-US"/>
           </a:p>
         </p:txBody>
       </p:sp>
@@ -429,7 +429,7 @@
               <a:rPr lang="en-US"/>
               <a:t>Fifth level</a:t>
             </a:r>
-            <a:endParaRPr lang="ru-RU"/>
+            <a:endParaRPr lang="en-US"/>
           </a:p>
         </p:txBody>
       </p:sp>
@@ -455,10 +455,10 @@
           <a:lstStyle/>
           <a:p>
             <a:fld id="{961A2009-0CEE-41C1-939A-B9C723B78133}" type="datetimeFigureOut">
-              <a:rPr lang="ru-RU" smtClean="0"/>
+              <a:rPr lang="en-US" smtClean="0"/>
               <a:t>05.03.2026</a:t>
             </a:fld>
-            <a:endParaRPr lang="ru-RU"/>
+            <a:endParaRPr lang="en-US"/>
           </a:p>
         </p:txBody>
       </p:sp>
@@ -483,7 +483,7 @@
           <a:bodyPr/>
           <a:lstStyle/>
           <a:p>
-            <a:endParaRPr lang="ru-RU"/>
+            <a:endParaRPr lang="en-US"/>
           </a:p>
         </p:txBody>
       </p:sp>
@@ -509,10 +509,10 @@
           <a:lstStyle/>
           <a:p>
             <a:fld id="{20CA96BB-6BF3-4E52-BE21-7A7A15C0727C}" type="slidenum">
-              <a:rPr lang="ru-RU" smtClean="0"/>
+              <a:rPr lang="en-US" smtClean="0"/>
               <a:t>‹#›</a:t>
             </a:fld>
-            <a:endParaRPr lang="ru-RU"/>
+            <a:endParaRPr lang="en-US"/>
           </a:p>
         </p:txBody>
       </p:sp>
@@ -576,7 +576,7 @@
               <a:rPr lang="en-US"/>
               <a:t>Click to edit Master title style</a:t>
             </a:r>
-            <a:endParaRPr lang="ru-RU"/>
+            <a:endParaRPr lang="en-US"/>
           </a:p>
         </p:txBody>
       </p:sp>
@@ -639,7 +639,7 @@
               <a:rPr lang="en-US"/>
               <a:t>Fifth level</a:t>
             </a:r>
-            <a:endParaRPr lang="ru-RU"/>
+            <a:endParaRPr lang="en-US"/>
           </a:p>
         </p:txBody>
       </p:sp>
@@ -665,10 +665,10 @@
           <a:lstStyle/>
           <a:p>
             <a:fld id="{961A2009-0CEE-41C1-939A-B9C723B78133}" type="datetimeFigureOut">
-              <a:rPr lang="ru-RU" smtClean="0"/>
+              <a:rPr lang="en-US" smtClean="0"/>
               <a:t>05.03.2026</a:t>
             </a:fld>
-            <a:endParaRPr lang="ru-RU"/>
+            <a:endParaRPr lang="en-US"/>
           </a:p>
         </p:txBody>
       </p:sp>
@@ -693,7 +693,7 @@
           <a:bodyPr/>
           <a:lstStyle/>
           <a:p>
-            <a:endParaRPr lang="ru-RU"/>
+            <a:endParaRPr lang="en-US"/>
           </a:p>
         </p:txBody>
       </p:sp>
@@ -719,10 +719,10 @@
           <a:lstStyle/>
           <a:p>
             <a:fld id="{20CA96BB-6BF3-4E52-BE21-7A7A15C0727C}" type="slidenum">
-              <a:rPr lang="ru-RU" smtClean="0"/>
+              <a:rPr lang="en-US" smtClean="0"/>
               <a:t>‹#›</a:t>
             </a:fld>
-            <a:endParaRPr lang="ru-RU"/>
+            <a:endParaRPr lang="en-US"/>
           </a:p>
         </p:txBody>
       </p:sp>
@@ -781,7 +781,7 @@
               <a:rPr lang="en-US"/>
               <a:t>Click to edit Master title style</a:t>
             </a:r>
-            <a:endParaRPr lang="ru-RU"/>
+            <a:endParaRPr lang="en-US"/>
           </a:p>
         </p:txBody>
       </p:sp>
@@ -839,7 +839,7 @@
               <a:rPr lang="en-US"/>
               <a:t>Fifth level</a:t>
             </a:r>
-            <a:endParaRPr lang="ru-RU"/>
+            <a:endParaRPr lang="en-US"/>
           </a:p>
         </p:txBody>
       </p:sp>
@@ -865,10 +865,10 @@
           <a:lstStyle/>
           <a:p>
             <a:fld id="{961A2009-0CEE-41C1-939A-B9C723B78133}" type="datetimeFigureOut">
-              <a:rPr lang="ru-RU" smtClean="0"/>
+              <a:rPr lang="en-US" smtClean="0"/>
               <a:t>05.03.2026</a:t>
             </a:fld>
-            <a:endParaRPr lang="ru-RU"/>
+            <a:endParaRPr lang="en-US"/>
           </a:p>
         </p:txBody>
       </p:sp>
@@ -893,7 +893,7 @@
           <a:bodyPr/>
           <a:lstStyle/>
           <a:p>
-            <a:endParaRPr lang="ru-RU"/>
+            <a:endParaRPr lang="en-US"/>
           </a:p>
         </p:txBody>
       </p:sp>
@@ -919,10 +919,10 @@
           <a:lstStyle/>
           <a:p>
             <a:fld id="{20CA96BB-6BF3-4E52-BE21-7A7A15C0727C}" type="slidenum">
-              <a:rPr lang="ru-RU" smtClean="0"/>
+              <a:rPr lang="en-US" smtClean="0"/>
               <a:t>‹#›</a:t>
             </a:fld>
-            <a:endParaRPr lang="ru-RU"/>
+            <a:endParaRPr lang="en-US"/>
           </a:p>
         </p:txBody>
       </p:sp>
@@ -990,7 +990,7 @@
               <a:rPr lang="en-US"/>
               <a:t>Click to edit Master title style</a:t>
             </a:r>
-            <a:endParaRPr lang="ru-RU"/>
+            <a:endParaRPr lang="en-US"/>
           </a:p>
         </p:txBody>
       </p:sp>
@@ -1141,10 +1141,10 @@
           <a:lstStyle/>
           <a:p>
             <a:fld id="{961A2009-0CEE-41C1-939A-B9C723B78133}" type="datetimeFigureOut">
-              <a:rPr lang="ru-RU" smtClean="0"/>
+              <a:rPr lang="en-US" smtClean="0"/>
               <a:t>05.03.2026</a:t>
             </a:fld>
-            <a:endParaRPr lang="ru-RU"/>
+            <a:endParaRPr lang="en-US"/>
           </a:p>
         </p:txBody>
       </p:sp>
@@ -1169,7 +1169,7 @@
           <a:bodyPr/>
           <a:lstStyle/>
           <a:p>
-            <a:endParaRPr lang="ru-RU"/>
+            <a:endParaRPr lang="en-US"/>
           </a:p>
         </p:txBody>
       </p:sp>
@@ -1195,10 +1195,10 @@
           <a:lstStyle/>
           <a:p>
             <a:fld id="{20CA96BB-6BF3-4E52-BE21-7A7A15C0727C}" type="slidenum">
-              <a:rPr lang="ru-RU" smtClean="0"/>
+              <a:rPr lang="en-US" smtClean="0"/>
               <a:t>‹#›</a:t>
             </a:fld>
-            <a:endParaRPr lang="ru-RU"/>
+            <a:endParaRPr lang="en-US"/>
           </a:p>
         </p:txBody>
       </p:sp>
@@ -1257,7 +1257,7 @@
               <a:rPr lang="en-US"/>
               <a:t>Click to edit Master title style</a:t>
             </a:r>
-            <a:endParaRPr lang="ru-RU"/>
+            <a:endParaRPr lang="en-US"/>
           </a:p>
         </p:txBody>
       </p:sp>
@@ -1320,7 +1320,7 @@
               <a:rPr lang="en-US"/>
               <a:t>Fifth level</a:t>
             </a:r>
-            <a:endParaRPr lang="ru-RU"/>
+            <a:endParaRPr lang="en-US"/>
           </a:p>
         </p:txBody>
       </p:sp>
@@ -1383,7 +1383,7 @@
               <a:rPr lang="en-US"/>
               <a:t>Fifth level</a:t>
             </a:r>
-            <a:endParaRPr lang="ru-RU"/>
+            <a:endParaRPr lang="en-US"/>
           </a:p>
         </p:txBody>
       </p:sp>
@@ -1409,10 +1409,10 @@
           <a:lstStyle/>
           <a:p>
             <a:fld id="{961A2009-0CEE-41C1-939A-B9C723B78133}" type="datetimeFigureOut">
-              <a:rPr lang="ru-RU" smtClean="0"/>
+              <a:rPr lang="en-US" smtClean="0"/>
               <a:t>05.03.2026</a:t>
             </a:fld>
-            <a:endParaRPr lang="ru-RU"/>
+            <a:endParaRPr lang="en-US"/>
           </a:p>
         </p:txBody>
       </p:sp>
@@ -1437,7 +1437,7 @@
           <a:bodyPr/>
           <a:lstStyle/>
           <a:p>
-            <a:endParaRPr lang="ru-RU"/>
+            <a:endParaRPr lang="en-US"/>
           </a:p>
         </p:txBody>
       </p:sp>
@@ -1463,10 +1463,10 @@
           <a:lstStyle/>
           <a:p>
             <a:fld id="{20CA96BB-6BF3-4E52-BE21-7A7A15C0727C}" type="slidenum">
-              <a:rPr lang="ru-RU" smtClean="0"/>
+              <a:rPr lang="en-US" smtClean="0"/>
               <a:t>‹#›</a:t>
             </a:fld>
-            <a:endParaRPr lang="ru-RU"/>
+            <a:endParaRPr lang="en-US"/>
           </a:p>
         </p:txBody>
       </p:sp>
@@ -1530,7 +1530,7 @@
               <a:rPr lang="en-US"/>
               <a:t>Click to edit Master title style</a:t>
             </a:r>
-            <a:endParaRPr lang="ru-RU"/>
+            <a:endParaRPr lang="en-US"/>
           </a:p>
         </p:txBody>
       </p:sp>
@@ -1664,7 +1664,7 @@
               <a:rPr lang="en-US"/>
               <a:t>Fifth level</a:t>
             </a:r>
-            <a:endParaRPr lang="ru-RU"/>
+            <a:endParaRPr lang="en-US"/>
           </a:p>
         </p:txBody>
       </p:sp>
@@ -1798,7 +1798,7 @@
               <a:rPr lang="en-US"/>
               <a:t>Fifth level</a:t>
             </a:r>
-            <a:endParaRPr lang="ru-RU"/>
+            <a:endParaRPr lang="en-US"/>
           </a:p>
         </p:txBody>
       </p:sp>
@@ -1824,10 +1824,10 @@
           <a:lstStyle/>
           <a:p>
             <a:fld id="{961A2009-0CEE-41C1-939A-B9C723B78133}" type="datetimeFigureOut">
-              <a:rPr lang="ru-RU" smtClean="0"/>
+              <a:rPr lang="en-US" smtClean="0"/>
               <a:t>05.03.2026</a:t>
             </a:fld>
-            <a:endParaRPr lang="ru-RU"/>
+            <a:endParaRPr lang="en-US"/>
           </a:p>
         </p:txBody>
       </p:sp>
@@ -1852,7 +1852,7 @@
           <a:bodyPr/>
           <a:lstStyle/>
           <a:p>
-            <a:endParaRPr lang="ru-RU"/>
+            <a:endParaRPr lang="en-US"/>
           </a:p>
         </p:txBody>
       </p:sp>
@@ -1878,10 +1878,10 @@
           <a:lstStyle/>
           <a:p>
             <a:fld id="{20CA96BB-6BF3-4E52-BE21-7A7A15C0727C}" type="slidenum">
-              <a:rPr lang="ru-RU" smtClean="0"/>
+              <a:rPr lang="en-US" smtClean="0"/>
               <a:t>‹#›</a:t>
             </a:fld>
-            <a:endParaRPr lang="ru-RU"/>
+            <a:endParaRPr lang="en-US"/>
           </a:p>
         </p:txBody>
       </p:sp>
@@ -1940,7 +1940,7 @@
               <a:rPr lang="en-US"/>
               <a:t>Click to edit Master title style</a:t>
             </a:r>
-            <a:endParaRPr lang="ru-RU"/>
+            <a:endParaRPr lang="en-US"/>
           </a:p>
         </p:txBody>
       </p:sp>
@@ -1966,10 +1966,10 @@
           <a:lstStyle/>
           <a:p>
             <a:fld id="{961A2009-0CEE-41C1-939A-B9C723B78133}" type="datetimeFigureOut">
-              <a:rPr lang="ru-RU" smtClean="0"/>
+              <a:rPr lang="en-US" smtClean="0"/>
               <a:t>05.03.2026</a:t>
             </a:fld>
-            <a:endParaRPr lang="ru-RU"/>
+            <a:endParaRPr lang="en-US"/>
           </a:p>
         </p:txBody>
       </p:sp>
@@ -1994,7 +1994,7 @@
           <a:bodyPr/>
           <a:lstStyle/>
           <a:p>
-            <a:endParaRPr lang="ru-RU"/>
+            <a:endParaRPr lang="en-US"/>
           </a:p>
         </p:txBody>
       </p:sp>
@@ -2020,10 +2020,10 @@
           <a:lstStyle/>
           <a:p>
             <a:fld id="{20CA96BB-6BF3-4E52-BE21-7A7A15C0727C}" type="slidenum">
-              <a:rPr lang="ru-RU" smtClean="0"/>
+              <a:rPr lang="en-US" smtClean="0"/>
               <a:t>‹#›</a:t>
             </a:fld>
-            <a:endParaRPr lang="ru-RU"/>
+            <a:endParaRPr lang="en-US"/>
           </a:p>
         </p:txBody>
       </p:sp>
@@ -2079,10 +2079,10 @@
           <a:lstStyle/>
           <a:p>
             <a:fld id="{961A2009-0CEE-41C1-939A-B9C723B78133}" type="datetimeFigureOut">
-              <a:rPr lang="ru-RU" smtClean="0"/>
+              <a:rPr lang="en-US" smtClean="0"/>
               <a:t>05.03.2026</a:t>
             </a:fld>
-            <a:endParaRPr lang="ru-RU"/>
+            <a:endParaRPr lang="en-US"/>
           </a:p>
         </p:txBody>
       </p:sp>
@@ -2107,7 +2107,7 @@
           <a:bodyPr/>
           <a:lstStyle/>
           <a:p>
-            <a:endParaRPr lang="ru-RU"/>
+            <a:endParaRPr lang="en-US"/>
           </a:p>
         </p:txBody>
       </p:sp>
@@ -2133,10 +2133,10 @@
           <a:lstStyle/>
           <a:p>
             <a:fld id="{20CA96BB-6BF3-4E52-BE21-7A7A15C0727C}" type="slidenum">
-              <a:rPr lang="ru-RU" smtClean="0"/>
+              <a:rPr lang="en-US" smtClean="0"/>
               <a:t>‹#›</a:t>
             </a:fld>
-            <a:endParaRPr lang="ru-RU"/>
+            <a:endParaRPr lang="en-US"/>
           </a:p>
         </p:txBody>
       </p:sp>
@@ -2204,7 +2204,7 @@
               <a:rPr lang="en-US"/>
               <a:t>Click to edit Master title style</a:t>
             </a:r>
-            <a:endParaRPr lang="ru-RU"/>
+            <a:endParaRPr lang="en-US"/>
           </a:p>
         </p:txBody>
       </p:sp>
@@ -2295,7 +2295,7 @@
               <a:rPr lang="en-US"/>
               <a:t>Fifth level</a:t>
             </a:r>
-            <a:endParaRPr lang="ru-RU"/>
+            <a:endParaRPr lang="en-US"/>
           </a:p>
         </p:txBody>
       </p:sp>
@@ -2392,10 +2392,10 @@
           <a:lstStyle/>
           <a:p>
             <a:fld id="{961A2009-0CEE-41C1-939A-B9C723B78133}" type="datetimeFigureOut">
-              <a:rPr lang="ru-RU" smtClean="0"/>
+              <a:rPr lang="en-US" smtClean="0"/>
               <a:t>05.03.2026</a:t>
             </a:fld>
-            <a:endParaRPr lang="ru-RU"/>
+            <a:endParaRPr lang="en-US"/>
           </a:p>
         </p:txBody>
       </p:sp>
@@ -2420,7 +2420,7 @@
           <a:bodyPr/>
           <a:lstStyle/>
           <a:p>
-            <a:endParaRPr lang="ru-RU"/>
+            <a:endParaRPr lang="en-US"/>
           </a:p>
         </p:txBody>
       </p:sp>
@@ -2446,10 +2446,10 @@
           <a:lstStyle/>
           <a:p>
             <a:fld id="{20CA96BB-6BF3-4E52-BE21-7A7A15C0727C}" type="slidenum">
-              <a:rPr lang="ru-RU" smtClean="0"/>
+              <a:rPr lang="en-US" smtClean="0"/>
               <a:t>‹#›</a:t>
             </a:fld>
-            <a:endParaRPr lang="ru-RU"/>
+            <a:endParaRPr lang="en-US"/>
           </a:p>
         </p:txBody>
       </p:sp>
@@ -2517,7 +2517,7 @@
               <a:rPr lang="en-US"/>
               <a:t>Click to edit Master title style</a:t>
             </a:r>
-            <a:endParaRPr lang="ru-RU"/>
+            <a:endParaRPr lang="en-US"/>
           </a:p>
         </p:txBody>
       </p:sp>
@@ -2584,7 +2584,7 @@
             </a:lvl9pPr>
           </a:lstStyle>
           <a:p>
-            <a:endParaRPr lang="ru-RU"/>
+            <a:endParaRPr lang="en-US"/>
           </a:p>
         </p:txBody>
       </p:sp>
@@ -2681,10 +2681,10 @@
           <a:lstStyle/>
           <a:p>
             <a:fld id="{961A2009-0CEE-41C1-939A-B9C723B78133}" type="datetimeFigureOut">
-              <a:rPr lang="ru-RU" smtClean="0"/>
+              <a:rPr lang="en-US" smtClean="0"/>
               <a:t>05.03.2026</a:t>
             </a:fld>
-            <a:endParaRPr lang="ru-RU"/>
+            <a:endParaRPr lang="en-US"/>
           </a:p>
         </p:txBody>
       </p:sp>
@@ -2709,7 +2709,7 @@
           <a:bodyPr/>
           <a:lstStyle/>
           <a:p>
-            <a:endParaRPr lang="ru-RU"/>
+            <a:endParaRPr lang="en-US"/>
           </a:p>
         </p:txBody>
       </p:sp>
@@ -2735,10 +2735,10 @@
           <a:lstStyle/>
           <a:p>
             <a:fld id="{20CA96BB-6BF3-4E52-BE21-7A7A15C0727C}" type="slidenum">
-              <a:rPr lang="ru-RU" smtClean="0"/>
+              <a:rPr lang="en-US" smtClean="0"/>
               <a:t>‹#›</a:t>
             </a:fld>
-            <a:endParaRPr lang="ru-RU"/>
+            <a:endParaRPr lang="en-US"/>
           </a:p>
         </p:txBody>
       </p:sp>
@@ -2812,7 +2812,7 @@
               <a:rPr lang="en-US"/>
               <a:t>Click to edit Master title style</a:t>
             </a:r>
-            <a:endParaRPr lang="ru-RU"/>
+            <a:endParaRPr lang="en-US"/>
           </a:p>
         </p:txBody>
       </p:sp>
@@ -2880,7 +2880,7 @@
               <a:rPr lang="en-US"/>
               <a:t>Fifth level</a:t>
             </a:r>
-            <a:endParaRPr lang="ru-RU"/>
+            <a:endParaRPr lang="en-US"/>
           </a:p>
         </p:txBody>
       </p:sp>
@@ -2924,10 +2924,10 @@
           </a:lstStyle>
           <a:p>
             <a:fld id="{961A2009-0CEE-41C1-939A-B9C723B78133}" type="datetimeFigureOut">
-              <a:rPr lang="ru-RU" smtClean="0"/>
+              <a:rPr lang="en-US" smtClean="0"/>
               <a:t>05.03.2026</a:t>
             </a:fld>
-            <a:endParaRPr lang="ru-RU"/>
+            <a:endParaRPr lang="en-US"/>
           </a:p>
         </p:txBody>
       </p:sp>
@@ -2970,7 +2970,7 @@
             </a:lvl1pPr>
           </a:lstStyle>
           <a:p>
-            <a:endParaRPr lang="ru-RU"/>
+            <a:endParaRPr lang="en-US"/>
           </a:p>
         </p:txBody>
       </p:sp>
@@ -3014,10 +3014,10 @@
           </a:lstStyle>
           <a:p>
             <a:fld id="{20CA96BB-6BF3-4E52-BE21-7A7A15C0727C}" type="slidenum">
-              <a:rPr lang="ru-RU" smtClean="0"/>
+              <a:rPr lang="en-US" smtClean="0"/>
               <a:t>‹#›</a:t>
             </a:fld>
-            <a:endParaRPr lang="ru-RU"/>
+            <a:endParaRPr lang="en-US"/>
           </a:p>
         </p:txBody>
       </p:sp>
@@ -3228,7 +3228,7 @@
     </p:bodyStyle>
     <p:otherStyle>
       <a:defPPr>
-        <a:defRPr lang="ru-RU"/>
+        <a:defRPr lang="en-US"/>
       </a:defPPr>
       <a:lvl1pPr marL="0" algn="l" defTabSz="914400" rtl="0" eaLnBrk="1" latinLnBrk="0" hangingPunct="1">
         <a:defRPr sz="1800" kern="1200">
